--- a/文献阅读/张宗桪-.pptx
+++ b/文献阅读/张宗桪-.pptx
@@ -8,6 +8,20 @@
     <p:sldId id="256" r:id="rId2"/>
     <p:sldId id="259" r:id="rId3"/>
     <p:sldId id="261" r:id="rId4"/>
+    <p:sldId id="262" r:id="rId5"/>
+    <p:sldId id="263" r:id="rId6"/>
+    <p:sldId id="264" r:id="rId7"/>
+    <p:sldId id="265" r:id="rId8"/>
+    <p:sldId id="268" r:id="rId9"/>
+    <p:sldId id="266" r:id="rId10"/>
+    <p:sldId id="267" r:id="rId11"/>
+    <p:sldId id="269" r:id="rId12"/>
+    <p:sldId id="270" r:id="rId13"/>
+    <p:sldId id="271" r:id="rId14"/>
+    <p:sldId id="272" r:id="rId15"/>
+    <p:sldId id="273" r:id="rId16"/>
+    <p:sldId id="274" r:id="rId17"/>
+    <p:sldId id="275" r:id="rId18"/>
   </p:sldIdLst>
   <p:sldSz cx="12192000" cy="6858000"/>
   <p:notesSz cx="6858000" cy="9144000"/>
@@ -1055,42 +1069,6 @@
         </a:p>
       </dgm:t>
     </dgm:pt>
-    <dgm:pt modelId="{19AB9FAB-15B2-48E2-B7A9-EFD593131FF1}">
-      <dgm:prSet phldrT="[文本]" custT="1"/>
-      <dgm:spPr/>
-      <dgm:t>
-        <a:bodyPr/>
-        <a:lstStyle/>
-        <a:p>
-          <a:r>
-            <a:rPr lang="zh-CN" altLang="en-US" sz="2000" dirty="0"/>
-            <a:t>网络架构</a:t>
-          </a:r>
-        </a:p>
-      </dgm:t>
-    </dgm:pt>
-    <dgm:pt modelId="{17A52309-31FE-4073-87F8-6F9CFBA149E8}" type="parTrans" cxnId="{92F281DD-454B-4D6D-BA10-1B609943D278}">
-      <dgm:prSet/>
-      <dgm:spPr/>
-      <dgm:t>
-        <a:bodyPr/>
-        <a:lstStyle/>
-        <a:p>
-          <a:endParaRPr lang="zh-CN" altLang="en-US"/>
-        </a:p>
-      </dgm:t>
-    </dgm:pt>
-    <dgm:pt modelId="{16633F28-5D9B-4463-B4EF-91761F2AD78D}" type="sibTrans" cxnId="{92F281DD-454B-4D6D-BA10-1B609943D278}">
-      <dgm:prSet/>
-      <dgm:spPr/>
-      <dgm:t>
-        <a:bodyPr/>
-        <a:lstStyle/>
-        <a:p>
-          <a:endParaRPr lang="zh-CN" altLang="en-US"/>
-        </a:p>
-      </dgm:t>
-    </dgm:pt>
     <dgm:pt modelId="{05BE3A41-958E-4FE3-9CDB-04212D4ACD67}">
       <dgm:prSet phldrT="[文本]"/>
       <dgm:spPr/>
@@ -1326,12 +1304,12 @@
     <dgm:cxn modelId="{CAD46063-114E-422D-8BD0-E380A789CC21}" type="presOf" srcId="{372EE177-9220-4540-AA03-54030447A842}" destId="{160DE56B-C1D9-42E4-A942-F7DDC8F7C922}" srcOrd="0" destOrd="1" presId="urn:microsoft.com/office/officeart/2005/8/layout/hList1"/>
     <dgm:cxn modelId="{9764CC44-85EA-48C7-8B09-3A82DC1AEEA0}" type="presOf" srcId="{588FAB3E-8E08-430E-A7D8-AB20D23081EF}" destId="{9B74609E-B1F4-46CE-9523-EA37010C8E5F}" srcOrd="0" destOrd="0" presId="urn:microsoft.com/office/officeart/2005/8/layout/hList1"/>
     <dgm:cxn modelId="{F0B6E447-D163-4ACD-9943-4818E8D668C0}" type="presOf" srcId="{239E81E4-3641-4F3A-A7FF-071C8AD2EF04}" destId="{47FCFBF9-6E75-4F5C-B7F7-F452E464FB24}" srcOrd="0" destOrd="0" presId="urn:microsoft.com/office/officeart/2005/8/layout/hList1"/>
-    <dgm:cxn modelId="{85AD9D6C-E1F7-4A2F-98F9-567F9F3C3F6A}" srcId="{E029E8E3-BA94-4E38-B486-F0BE93D0CB8F}" destId="{E3731114-64D9-4F6A-8A95-389F5445CACE}" srcOrd="2" destOrd="0" parTransId="{36140716-D216-46BD-9A3F-4573961A08DA}" sibTransId="{F81E8FC2-FE36-4FFB-A806-2E8C6E284C7A}"/>
+    <dgm:cxn modelId="{85AD9D6C-E1F7-4A2F-98F9-567F9F3C3F6A}" srcId="{E029E8E3-BA94-4E38-B486-F0BE93D0CB8F}" destId="{E3731114-64D9-4F6A-8A95-389F5445CACE}" srcOrd="1" destOrd="0" parTransId="{36140716-D216-46BD-9A3F-4573961A08DA}" sibTransId="{F81E8FC2-FE36-4FFB-A806-2E8C6E284C7A}"/>
     <dgm:cxn modelId="{E509526F-317B-4457-9853-75FD2511D6A7}" srcId="{59F46E65-11DE-47CE-9445-64200CF431A8}" destId="{372EE177-9220-4540-AA03-54030447A842}" srcOrd="1" destOrd="0" parTransId="{BF016E00-4292-4B47-B048-3FCCDAA2D9CA}" sibTransId="{D37C1B84-5794-4071-B464-65C6DC93AE5C}"/>
     <dgm:cxn modelId="{8D1FC677-C5D8-4F64-8C9E-C2CC7252B704}" type="presOf" srcId="{05BE3A41-958E-4FE3-9CDB-04212D4ACD67}" destId="{35C6C27F-C411-41AF-89D3-8DB1AB547C75}" srcOrd="0" destOrd="0" presId="urn:microsoft.com/office/officeart/2005/8/layout/hList1"/>
     <dgm:cxn modelId="{42550E58-6C0B-48AD-AF54-8B1345B0FAE9}" srcId="{239E81E4-3641-4F3A-A7FF-071C8AD2EF04}" destId="{59F46E65-11DE-47CE-9445-64200CF431A8}" srcOrd="0" destOrd="0" parTransId="{6924FC05-5095-4061-88BF-D773597A898D}" sibTransId="{0F607E61-83CA-4734-BA53-40836AD71787}"/>
     <dgm:cxn modelId="{673E9F79-7DDD-4B00-BBEF-320EFC1FDF19}" type="presOf" srcId="{4F3F3D2A-F138-4985-AD1D-93D20DEAEF26}" destId="{9B74609E-B1F4-46CE-9523-EA37010C8E5F}" srcOrd="0" destOrd="1" presId="urn:microsoft.com/office/officeart/2005/8/layout/hList1"/>
-    <dgm:cxn modelId="{1C7C3B93-AB66-4070-8409-85CF4FC42464}" type="presOf" srcId="{E3731114-64D9-4F6A-8A95-389F5445CACE}" destId="{57BD0FE5-FA42-4B26-B7DD-F817CB935346}" srcOrd="0" destOrd="2" presId="urn:microsoft.com/office/officeart/2005/8/layout/hList1"/>
+    <dgm:cxn modelId="{1C7C3B93-AB66-4070-8409-85CF4FC42464}" type="presOf" srcId="{E3731114-64D9-4F6A-8A95-389F5445CACE}" destId="{57BD0FE5-FA42-4B26-B7DD-F817CB935346}" srcOrd="0" destOrd="1" presId="urn:microsoft.com/office/officeart/2005/8/layout/hList1"/>
     <dgm:cxn modelId="{4E772B99-2B6B-4CEA-BE6F-D2BC97358644}" srcId="{59F46E65-11DE-47CE-9445-64200CF431A8}" destId="{25D14F8C-5803-44A7-A2D2-0439D2593EC6}" srcOrd="0" destOrd="0" parTransId="{DF5906ED-B823-4F74-9D86-BE0E5E402785}" sibTransId="{73B3280E-D8FD-4FEF-A35D-13B4293FBF27}"/>
     <dgm:cxn modelId="{C84ABFB1-3A74-4CF9-A659-EC4BC185DDF4}" type="presOf" srcId="{25D14F8C-5803-44A7-A2D2-0439D2593EC6}" destId="{160DE56B-C1D9-42E4-A942-F7DDC8F7C922}" srcOrd="0" destOrd="0" presId="urn:microsoft.com/office/officeart/2005/8/layout/hList1"/>
     <dgm:cxn modelId="{4A439BB8-2425-4E6A-9082-5E382A553586}" type="presOf" srcId="{59F46E65-11DE-47CE-9445-64200CF431A8}" destId="{A0D0FF07-0FC2-4361-BBCB-886F168523C2}" srcOrd="0" destOrd="0" presId="urn:microsoft.com/office/officeart/2005/8/layout/hList1"/>
@@ -1339,9 +1317,7 @@
     <dgm:cxn modelId="{0ADE4EBB-C7A6-4865-8353-86D20CDB74DE}" srcId="{239E81E4-3641-4F3A-A7FF-071C8AD2EF04}" destId="{05BE3A41-958E-4FE3-9CDB-04212D4ACD67}" srcOrd="2" destOrd="0" parTransId="{E36211EB-3DC1-42E1-BC22-E28DC51C684F}" sibTransId="{7A1AFF6E-B06C-4FDB-B2E5-E23D050CF923}"/>
     <dgm:cxn modelId="{869AFED1-D723-4F9E-B832-50B06E149789}" srcId="{239E81E4-3641-4F3A-A7FF-071C8AD2EF04}" destId="{E029E8E3-BA94-4E38-B486-F0BE93D0CB8F}" srcOrd="1" destOrd="0" parTransId="{14C61FFA-816C-44FC-864B-3C63AFE73F2F}" sibTransId="{58AFD101-6985-4BF6-834D-539ECBFF4EB0}"/>
     <dgm:cxn modelId="{06BA7DD2-1E62-4CBB-82FA-259BFC2BEA08}" type="presOf" srcId="{82C6670B-C307-4FC0-9F85-9E13BB2B7F32}" destId="{57BD0FE5-FA42-4B26-B7DD-F817CB935346}" srcOrd="0" destOrd="0" presId="urn:microsoft.com/office/officeart/2005/8/layout/hList1"/>
-    <dgm:cxn modelId="{92F281DD-454B-4D6D-BA10-1B609943D278}" srcId="{E029E8E3-BA94-4E38-B486-F0BE93D0CB8F}" destId="{19AB9FAB-15B2-48E2-B7A9-EFD593131FF1}" srcOrd="1" destOrd="0" parTransId="{17A52309-31FE-4073-87F8-6F9CFBA149E8}" sibTransId="{16633F28-5D9B-4463-B4EF-91761F2AD78D}"/>
     <dgm:cxn modelId="{6B925AEB-9487-4B5F-A3B8-3CF956316728}" srcId="{05BE3A41-958E-4FE3-9CDB-04212D4ACD67}" destId="{4F3F3D2A-F138-4985-AD1D-93D20DEAEF26}" srcOrd="1" destOrd="0" parTransId="{3F601823-9433-478C-BB07-163E2D71323F}" sibTransId="{0D715616-3874-46B5-9DB6-628F77002CDD}"/>
-    <dgm:cxn modelId="{BA8DEBED-D394-4CBD-AD5A-1C8A844C37B1}" type="presOf" srcId="{19AB9FAB-15B2-48E2-B7A9-EFD593131FF1}" destId="{57BD0FE5-FA42-4B26-B7DD-F817CB935346}" srcOrd="0" destOrd="1" presId="urn:microsoft.com/office/officeart/2005/8/layout/hList1"/>
     <dgm:cxn modelId="{19AD94EE-38DE-4B59-B976-5F5AC31771FC}" type="presParOf" srcId="{47FCFBF9-6E75-4F5C-B7F7-F452E464FB24}" destId="{0E9F2FFC-858B-4E6E-8055-C4E2E6E81DBE}" srcOrd="0" destOrd="0" presId="urn:microsoft.com/office/officeart/2005/8/layout/hList1"/>
     <dgm:cxn modelId="{08233385-3DB7-4A21-AEA3-393D9EF2BDB9}" type="presParOf" srcId="{0E9F2FFC-858B-4E6E-8055-C4E2E6E81DBE}" destId="{A0D0FF07-0FC2-4361-BBCB-886F168523C2}" srcOrd="0" destOrd="0" presId="urn:microsoft.com/office/officeart/2005/8/layout/hList1"/>
     <dgm:cxn modelId="{9B9FE761-9379-4C5E-BEB0-98B0A5E279EC}" type="presParOf" srcId="{0E9F2FFC-858B-4E6E-8055-C4E2E6E81DBE}" destId="{160DE56B-C1D9-42E4-A942-F7DDC8F7C922}" srcOrd="1" destOrd="0" presId="urn:microsoft.com/office/officeart/2005/8/layout/hList1"/>
@@ -1698,24 +1674,6 @@
           <a:r>
             <a:rPr lang="zh-CN" altLang="en-US" sz="2000" kern="1200" dirty="0"/>
             <a:t>创新点</a:t>
-          </a:r>
-        </a:p>
-        <a:p>
-          <a:pPr marL="228600" lvl="1" indent="-228600" algn="l" defTabSz="889000">
-            <a:lnSpc>
-              <a:spcPct val="90000"/>
-            </a:lnSpc>
-            <a:spcBef>
-              <a:spcPct val="0"/>
-            </a:spcBef>
-            <a:spcAft>
-              <a:spcPct val="15000"/>
-            </a:spcAft>
-            <a:buChar char="•"/>
-          </a:pPr>
-          <a:r>
-            <a:rPr lang="zh-CN" altLang="en-US" sz="2000" kern="1200" dirty="0"/>
-            <a:t>网络架构</a:t>
           </a:r>
         </a:p>
         <a:p>
@@ -3320,7 +3278,7 @@
           <a:p>
             <a:fld id="{1D223DE6-8C69-450A-B260-047DE1F54FDF}" type="datetimeFigureOut">
               <a:rPr lang="zh-CN" altLang="en-US" smtClean="0"/>
-              <a:t>2025/12/16</a:t>
+              <a:t>2026/1/2</a:t>
             </a:fld>
             <a:endParaRPr lang="zh-CN" altLang="en-US"/>
           </a:p>
@@ -3518,7 +3476,7 @@
           <a:p>
             <a:fld id="{1D223DE6-8C69-450A-B260-047DE1F54FDF}" type="datetimeFigureOut">
               <a:rPr lang="zh-CN" altLang="en-US" smtClean="0"/>
-              <a:t>2025/12/16</a:t>
+              <a:t>2026/1/2</a:t>
             </a:fld>
             <a:endParaRPr lang="zh-CN" altLang="en-US"/>
           </a:p>
@@ -3726,7 +3684,7 @@
           <a:p>
             <a:fld id="{1D223DE6-8C69-450A-B260-047DE1F54FDF}" type="datetimeFigureOut">
               <a:rPr lang="zh-CN" altLang="en-US" smtClean="0"/>
-              <a:t>2025/12/16</a:t>
+              <a:t>2026/1/2</a:t>
             </a:fld>
             <a:endParaRPr lang="zh-CN" altLang="en-US"/>
           </a:p>
@@ -3924,7 +3882,7 @@
           <a:p>
             <a:fld id="{1D223DE6-8C69-450A-B260-047DE1F54FDF}" type="datetimeFigureOut">
               <a:rPr lang="zh-CN" altLang="en-US" smtClean="0"/>
-              <a:t>2025/12/16</a:t>
+              <a:t>2026/1/2</a:t>
             </a:fld>
             <a:endParaRPr lang="zh-CN" altLang="en-US"/>
           </a:p>
@@ -4199,7 +4157,7 @@
           <a:p>
             <a:fld id="{1D223DE6-8C69-450A-B260-047DE1F54FDF}" type="datetimeFigureOut">
               <a:rPr lang="zh-CN" altLang="en-US" smtClean="0"/>
-              <a:t>2025/12/16</a:t>
+              <a:t>2026/1/2</a:t>
             </a:fld>
             <a:endParaRPr lang="zh-CN" altLang="en-US"/>
           </a:p>
@@ -4464,7 +4422,7 @@
           <a:p>
             <a:fld id="{1D223DE6-8C69-450A-B260-047DE1F54FDF}" type="datetimeFigureOut">
               <a:rPr lang="zh-CN" altLang="en-US" smtClean="0"/>
-              <a:t>2025/12/16</a:t>
+              <a:t>2026/1/2</a:t>
             </a:fld>
             <a:endParaRPr lang="zh-CN" altLang="en-US"/>
           </a:p>
@@ -4876,7 +4834,7 @@
           <a:p>
             <a:fld id="{1D223DE6-8C69-450A-B260-047DE1F54FDF}" type="datetimeFigureOut">
               <a:rPr lang="zh-CN" altLang="en-US" smtClean="0"/>
-              <a:t>2025/12/16</a:t>
+              <a:t>2026/1/2</a:t>
             </a:fld>
             <a:endParaRPr lang="zh-CN" altLang="en-US"/>
           </a:p>
@@ -5017,7 +4975,7 @@
           <a:p>
             <a:fld id="{1D223DE6-8C69-450A-B260-047DE1F54FDF}" type="datetimeFigureOut">
               <a:rPr lang="zh-CN" altLang="en-US" smtClean="0"/>
-              <a:t>2025/12/16</a:t>
+              <a:t>2026/1/2</a:t>
             </a:fld>
             <a:endParaRPr lang="zh-CN" altLang="en-US"/>
           </a:p>
@@ -5130,7 +5088,7 @@
           <a:p>
             <a:fld id="{1D223DE6-8C69-450A-B260-047DE1F54FDF}" type="datetimeFigureOut">
               <a:rPr lang="zh-CN" altLang="en-US" smtClean="0"/>
-              <a:t>2025/12/16</a:t>
+              <a:t>2026/1/2</a:t>
             </a:fld>
             <a:endParaRPr lang="zh-CN" altLang="en-US"/>
           </a:p>
@@ -5441,7 +5399,7 @@
           <a:p>
             <a:fld id="{1D223DE6-8C69-450A-B260-047DE1F54FDF}" type="datetimeFigureOut">
               <a:rPr lang="zh-CN" altLang="en-US" smtClean="0"/>
-              <a:t>2025/12/16</a:t>
+              <a:t>2026/1/2</a:t>
             </a:fld>
             <a:endParaRPr lang="zh-CN" altLang="en-US"/>
           </a:p>
@@ -5729,7 +5687,7 @@
           <a:p>
             <a:fld id="{1D223DE6-8C69-450A-B260-047DE1F54FDF}" type="datetimeFigureOut">
               <a:rPr lang="zh-CN" altLang="en-US" smtClean="0"/>
-              <a:t>2025/12/16</a:t>
+              <a:t>2026/1/2</a:t>
             </a:fld>
             <a:endParaRPr lang="zh-CN" altLang="en-US"/>
           </a:p>
@@ -5970,7 +5928,7 @@
           <a:p>
             <a:fld id="{1D223DE6-8C69-450A-B260-047DE1F54FDF}" type="datetimeFigureOut">
               <a:rPr lang="zh-CN" altLang="en-US" smtClean="0"/>
-              <a:t>2025/12/16</a:t>
+              <a:t>2026/1/2</a:t>
             </a:fld>
             <a:endParaRPr lang="zh-CN" altLang="en-US"/>
           </a:p>
@@ -6473,10 +6431,1464 @@
           </a:prstGeom>
         </p:spPr>
       </p:pic>
+      <p:pic>
+        <p:nvPicPr>
+          <p:cNvPr id="6" name="图片 5" descr="文本&#10;&#10;AI 生成的内容可能不正确。">
+            <a:extLst>
+              <a:ext uri="{FF2B5EF4-FFF2-40B4-BE49-F238E27FC236}">
+                <a16:creationId xmlns:a16="http://schemas.microsoft.com/office/drawing/2014/main" id="{32A65893-0B7A-7D0F-9302-E0467139E7E2}"/>
+              </a:ext>
+            </a:extLst>
+          </p:cNvPr>
+          <p:cNvPicPr>
+            <a:picLocks noChangeAspect="1"/>
+          </p:cNvPicPr>
+          <p:nvPr/>
+        </p:nvPicPr>
+        <p:blipFill>
+          <a:blip r:embed="rId3"/>
+          <a:stretch>
+            <a:fillRect/>
+          </a:stretch>
+        </p:blipFill>
+        <p:spPr>
+          <a:xfrm>
+            <a:off x="2095645" y="2285840"/>
+            <a:ext cx="8230749" cy="2286319"/>
+          </a:xfrm>
+          <a:prstGeom prst="rect">
+            <a:avLst/>
+          </a:prstGeom>
+        </p:spPr>
+      </p:pic>
     </p:spTree>
     <p:extLst>
       <p:ext uri="{BB962C8B-B14F-4D97-AF65-F5344CB8AC3E}">
         <p14:creationId xmlns:p14="http://schemas.microsoft.com/office/powerpoint/2010/main" val="428706779"/>
+      </p:ext>
+    </p:extLst>
+  </p:cSld>
+  <p:clrMapOvr>
+    <a:masterClrMapping/>
+  </p:clrMapOvr>
+</p:sld>
+</file>
+
+<file path=ppt/slides/slide10.xml><?xml version="1.0" encoding="utf-8"?>
+<p:sld xmlns:a="http://schemas.openxmlformats.org/drawingml/2006/main" xmlns:r="http://schemas.openxmlformats.org/officeDocument/2006/relationships" xmlns:p="http://schemas.openxmlformats.org/presentationml/2006/main">
+  <p:cSld>
+    <p:spTree>
+      <p:nvGrpSpPr>
+        <p:cNvPr id="1" name="">
+          <a:extLst>
+            <a:ext uri="{FF2B5EF4-FFF2-40B4-BE49-F238E27FC236}">
+              <a16:creationId xmlns:a16="http://schemas.microsoft.com/office/drawing/2014/main" id="{2E373269-38A4-E115-39E4-BDDB9804532E}"/>
+            </a:ext>
+          </a:extLst>
+        </p:cNvPr>
+        <p:cNvGrpSpPr/>
+        <p:nvPr/>
+      </p:nvGrpSpPr>
+      <p:grpSpPr>
+        <a:xfrm>
+          <a:off x="0" y="0"/>
+          <a:ext cx="0" cy="0"/>
+          <a:chOff x="0" y="0"/>
+          <a:chExt cx="0" cy="0"/>
+        </a:xfrm>
+      </p:grpSpPr>
+      <p:sp>
+        <p:nvSpPr>
+          <p:cNvPr id="2" name="标题 1">
+            <a:extLst>
+              <a:ext uri="{FF2B5EF4-FFF2-40B4-BE49-F238E27FC236}">
+                <a16:creationId xmlns:a16="http://schemas.microsoft.com/office/drawing/2014/main" id="{689A58A5-E60D-69D1-2B23-E2BEE773EEE4}"/>
+              </a:ext>
+            </a:extLst>
+          </p:cNvPr>
+          <p:cNvSpPr>
+            <a:spLocks noGrp="1"/>
+          </p:cNvSpPr>
+          <p:nvPr>
+            <p:ph type="title"/>
+          </p:nvPr>
+        </p:nvSpPr>
+        <p:spPr>
+          <a:xfrm>
+            <a:off x="838200" y="365126"/>
+            <a:ext cx="10515600" cy="865534"/>
+          </a:xfrm>
+        </p:spPr>
+        <p:txBody>
+          <a:bodyPr>
+            <a:normAutofit/>
+          </a:bodyPr>
+          <a:lstStyle/>
+          <a:p>
+            <a:r>
+              <a:rPr lang="zh-CN" altLang="en-US" sz="3200" dirty="0"/>
+              <a:t>捷径连接</a:t>
+            </a:r>
+            <a:endParaRPr lang="zh-CN" altLang="en-US" sz="2000" dirty="0"/>
+          </a:p>
+        </p:txBody>
+      </p:sp>
+      <p:pic>
+        <p:nvPicPr>
+          <p:cNvPr id="5" name="内容占位符 4">
+            <a:extLst>
+              <a:ext uri="{FF2B5EF4-FFF2-40B4-BE49-F238E27FC236}">
+                <a16:creationId xmlns:a16="http://schemas.microsoft.com/office/drawing/2014/main" id="{C4083615-0C5E-4E49-39E7-3FB3B8EB22E0}"/>
+              </a:ext>
+            </a:extLst>
+          </p:cNvPr>
+          <p:cNvPicPr>
+            <a:picLocks noGrp="1" noChangeAspect="1"/>
+          </p:cNvPicPr>
+          <p:nvPr>
+            <p:ph idx="1"/>
+          </p:nvPr>
+        </p:nvPicPr>
+        <p:blipFill>
+          <a:blip r:embed="rId2">
+            <a:extLst>
+              <a:ext uri="{28A0092B-C50C-407E-A947-70E740481C1C}">
+                <a14:useLocalDpi xmlns:a14="http://schemas.microsoft.com/office/drawing/2010/main" val="0"/>
+              </a:ext>
+            </a:extLst>
+          </a:blip>
+          <a:stretch>
+            <a:fillRect/>
+          </a:stretch>
+        </p:blipFill>
+        <p:spPr>
+          <a:xfrm>
+            <a:off x="10488266" y="310124"/>
+            <a:ext cx="865534" cy="865534"/>
+          </a:xfrm>
+        </p:spPr>
+      </p:pic>
+      <p:cxnSp>
+        <p:nvCxnSpPr>
+          <p:cNvPr id="7" name="直接连接符 6">
+            <a:extLst>
+              <a:ext uri="{FF2B5EF4-FFF2-40B4-BE49-F238E27FC236}">
+                <a16:creationId xmlns:a16="http://schemas.microsoft.com/office/drawing/2014/main" id="{E2CD527D-10E2-3C80-1414-464C446ADB6F}"/>
+              </a:ext>
+            </a:extLst>
+          </p:cNvPr>
+          <p:cNvCxnSpPr/>
+          <p:nvPr/>
+        </p:nvCxnSpPr>
+        <p:spPr>
+          <a:xfrm>
+            <a:off x="893774" y="1236928"/>
+            <a:ext cx="10548000" cy="0"/>
+          </a:xfrm>
+          <a:prstGeom prst="line">
+            <a:avLst/>
+          </a:prstGeom>
+        </p:spPr>
+        <p:style>
+          <a:lnRef idx="1">
+            <a:schemeClr val="accent1"/>
+          </a:lnRef>
+          <a:fillRef idx="0">
+            <a:schemeClr val="accent1"/>
+          </a:fillRef>
+          <a:effectRef idx="0">
+            <a:schemeClr val="accent1"/>
+          </a:effectRef>
+          <a:fontRef idx="minor">
+            <a:schemeClr val="tx1"/>
+          </a:fontRef>
+        </p:style>
+      </p:cxnSp>
+      <p:pic>
+        <p:nvPicPr>
+          <p:cNvPr id="4" name="图片 3">
+            <a:extLst>
+              <a:ext uri="{FF2B5EF4-FFF2-40B4-BE49-F238E27FC236}">
+                <a16:creationId xmlns:a16="http://schemas.microsoft.com/office/drawing/2014/main" id="{FF0F94EC-360D-C3F2-2A3C-DB4223A81D34}"/>
+              </a:ext>
+            </a:extLst>
+          </p:cNvPr>
+          <p:cNvPicPr>
+            <a:picLocks noChangeAspect="1"/>
+          </p:cNvPicPr>
+          <p:nvPr/>
+        </p:nvPicPr>
+        <p:blipFill>
+          <a:blip r:embed="rId3">
+            <a:extLst>
+              <a:ext uri="{28A0092B-C50C-407E-A947-70E740481C1C}">
+                <a14:useLocalDpi xmlns:a14="http://schemas.microsoft.com/office/drawing/2010/main" val="0"/>
+              </a:ext>
+            </a:extLst>
+          </a:blip>
+          <a:stretch>
+            <a:fillRect/>
+          </a:stretch>
+        </p:blipFill>
+        <p:spPr>
+          <a:xfrm>
+            <a:off x="1016337" y="1619108"/>
+            <a:ext cx="5418970" cy="4813321"/>
+          </a:xfrm>
+          <a:prstGeom prst="rect">
+            <a:avLst/>
+          </a:prstGeom>
+        </p:spPr>
+      </p:pic>
+      <p:sp>
+        <p:nvSpPr>
+          <p:cNvPr id="8" name="文本框 7">
+            <a:extLst>
+              <a:ext uri="{FF2B5EF4-FFF2-40B4-BE49-F238E27FC236}">
+                <a16:creationId xmlns:a16="http://schemas.microsoft.com/office/drawing/2014/main" id="{99F2A13F-EE8A-1907-D599-41B6C9EC98AF}"/>
+              </a:ext>
+            </a:extLst>
+          </p:cNvPr>
+          <p:cNvSpPr txBox="1"/>
+          <p:nvPr/>
+        </p:nvSpPr>
+        <p:spPr>
+          <a:xfrm>
+            <a:off x="7188679" y="3279410"/>
+            <a:ext cx="6096000" cy="746358"/>
+          </a:xfrm>
+          <a:prstGeom prst="rect">
+            <a:avLst/>
+          </a:prstGeom>
+          <a:noFill/>
+        </p:spPr>
+        <p:txBody>
+          <a:bodyPr wrap="square">
+            <a:spAutoFit/>
+          </a:bodyPr>
+          <a:lstStyle/>
+          <a:p>
+            <a:pPr>
+              <a:lnSpc>
+                <a:spcPts val="2099"/>
+              </a:lnSpc>
+              <a:spcAft>
+                <a:spcPts val="900"/>
+              </a:spcAft>
+            </a:pPr>
+            <a:r>
+              <a:rPr lang="en-US" altLang="zh-CN" b="1" i="0" dirty="0">
+                <a:solidFill>
+                  <a:srgbClr val="000000"/>
+                </a:solidFill>
+                <a:effectLst/>
+                <a:latin typeface="Lucida Grande"/>
+              </a:rPr>
+              <a:t>Training Very Deep Networks </a:t>
+            </a:r>
+          </a:p>
+          <a:p>
+            <a:pPr>
+              <a:lnSpc>
+                <a:spcPts val="2099"/>
+              </a:lnSpc>
+              <a:spcAft>
+                <a:spcPts val="900"/>
+              </a:spcAft>
+            </a:pPr>
+            <a:r>
+              <a:rPr lang="en-US" altLang="zh-CN" dirty="0"/>
+              <a:t>Neural Information Processing Systems 2015</a:t>
+            </a:r>
+            <a:endParaRPr lang="en-US" altLang="zh-CN" b="1" i="0" dirty="0">
+              <a:solidFill>
+                <a:srgbClr val="000000"/>
+              </a:solidFill>
+              <a:effectLst/>
+              <a:latin typeface="Lucida Grande"/>
+            </a:endParaRPr>
+          </a:p>
+        </p:txBody>
+      </p:sp>
+    </p:spTree>
+    <p:extLst>
+      <p:ext uri="{BB962C8B-B14F-4D97-AF65-F5344CB8AC3E}">
+        <p14:creationId xmlns:p14="http://schemas.microsoft.com/office/powerpoint/2010/main" val="3946219806"/>
+      </p:ext>
+    </p:extLst>
+  </p:cSld>
+  <p:clrMapOvr>
+    <a:masterClrMapping/>
+  </p:clrMapOvr>
+</p:sld>
+</file>
+
+<file path=ppt/slides/slide11.xml><?xml version="1.0" encoding="utf-8"?>
+<p:sld xmlns:a="http://schemas.openxmlformats.org/drawingml/2006/main" xmlns:r="http://schemas.openxmlformats.org/officeDocument/2006/relationships" xmlns:p="http://schemas.openxmlformats.org/presentationml/2006/main">
+  <p:cSld>
+    <p:spTree>
+      <p:nvGrpSpPr>
+        <p:cNvPr id="1" name="">
+          <a:extLst>
+            <a:ext uri="{FF2B5EF4-FFF2-40B4-BE49-F238E27FC236}">
+              <a16:creationId xmlns:a16="http://schemas.microsoft.com/office/drawing/2014/main" id="{B962A858-A60B-96A5-CF6F-34F144A14921}"/>
+            </a:ext>
+          </a:extLst>
+        </p:cNvPr>
+        <p:cNvGrpSpPr/>
+        <p:nvPr/>
+      </p:nvGrpSpPr>
+      <p:grpSpPr>
+        <a:xfrm>
+          <a:off x="0" y="0"/>
+          <a:ext cx="0" cy="0"/>
+          <a:chOff x="0" y="0"/>
+          <a:chExt cx="0" cy="0"/>
+        </a:xfrm>
+      </p:grpSpPr>
+      <p:sp>
+        <p:nvSpPr>
+          <p:cNvPr id="2" name="标题 1">
+            <a:extLst>
+              <a:ext uri="{FF2B5EF4-FFF2-40B4-BE49-F238E27FC236}">
+                <a16:creationId xmlns:a16="http://schemas.microsoft.com/office/drawing/2014/main" id="{C70B137F-6E12-3128-0A6B-CCF909149F02}"/>
+              </a:ext>
+            </a:extLst>
+          </p:cNvPr>
+          <p:cNvSpPr>
+            <a:spLocks noGrp="1"/>
+          </p:cNvSpPr>
+          <p:nvPr>
+            <p:ph type="title"/>
+          </p:nvPr>
+        </p:nvSpPr>
+        <p:spPr>
+          <a:xfrm>
+            <a:off x="838200" y="2996233"/>
+            <a:ext cx="10515600" cy="865534"/>
+          </a:xfrm>
+        </p:spPr>
+        <p:txBody>
+          <a:bodyPr>
+            <a:normAutofit/>
+          </a:bodyPr>
+          <a:lstStyle/>
+          <a:p>
+            <a:pPr algn="ctr"/>
+            <a:r>
+              <a:rPr lang="zh-CN" altLang="en-US" sz="3200" dirty="0"/>
+              <a:t>创新点</a:t>
+            </a:r>
+          </a:p>
+        </p:txBody>
+      </p:sp>
+      <p:pic>
+        <p:nvPicPr>
+          <p:cNvPr id="5" name="内容占位符 4">
+            <a:extLst>
+              <a:ext uri="{FF2B5EF4-FFF2-40B4-BE49-F238E27FC236}">
+                <a16:creationId xmlns:a16="http://schemas.microsoft.com/office/drawing/2014/main" id="{4D526BF0-310F-B7B4-29DA-7ED1CBC3D252}"/>
+              </a:ext>
+            </a:extLst>
+          </p:cNvPr>
+          <p:cNvPicPr>
+            <a:picLocks noGrp="1" noChangeAspect="1"/>
+          </p:cNvPicPr>
+          <p:nvPr>
+            <p:ph idx="1"/>
+          </p:nvPr>
+        </p:nvPicPr>
+        <p:blipFill>
+          <a:blip r:embed="rId2">
+            <a:extLst>
+              <a:ext uri="{28A0092B-C50C-407E-A947-70E740481C1C}">
+                <a14:useLocalDpi xmlns:a14="http://schemas.microsoft.com/office/drawing/2010/main" val="0"/>
+              </a:ext>
+            </a:extLst>
+          </a:blip>
+          <a:stretch>
+            <a:fillRect/>
+          </a:stretch>
+        </p:blipFill>
+        <p:spPr>
+          <a:xfrm>
+            <a:off x="10488266" y="310124"/>
+            <a:ext cx="865534" cy="865534"/>
+          </a:xfrm>
+        </p:spPr>
+      </p:pic>
+      <p:cxnSp>
+        <p:nvCxnSpPr>
+          <p:cNvPr id="7" name="直接连接符 6">
+            <a:extLst>
+              <a:ext uri="{FF2B5EF4-FFF2-40B4-BE49-F238E27FC236}">
+                <a16:creationId xmlns:a16="http://schemas.microsoft.com/office/drawing/2014/main" id="{30CC256F-E380-4267-A0DB-7A24423A3D4D}"/>
+              </a:ext>
+            </a:extLst>
+          </p:cNvPr>
+          <p:cNvCxnSpPr/>
+          <p:nvPr/>
+        </p:nvCxnSpPr>
+        <p:spPr>
+          <a:xfrm>
+            <a:off x="893774" y="1236928"/>
+            <a:ext cx="10548000" cy="0"/>
+          </a:xfrm>
+          <a:prstGeom prst="line">
+            <a:avLst/>
+          </a:prstGeom>
+        </p:spPr>
+        <p:style>
+          <a:lnRef idx="1">
+            <a:schemeClr val="accent1"/>
+          </a:lnRef>
+          <a:fillRef idx="0">
+            <a:schemeClr val="accent1"/>
+          </a:fillRef>
+          <a:effectRef idx="0">
+            <a:schemeClr val="accent1"/>
+          </a:effectRef>
+          <a:fontRef idx="minor">
+            <a:schemeClr val="tx1"/>
+          </a:fontRef>
+        </p:style>
+      </p:cxnSp>
+    </p:spTree>
+    <p:extLst>
+      <p:ext uri="{BB962C8B-B14F-4D97-AF65-F5344CB8AC3E}">
+        <p14:creationId xmlns:p14="http://schemas.microsoft.com/office/powerpoint/2010/main" val="3364270860"/>
+      </p:ext>
+    </p:extLst>
+  </p:cSld>
+  <p:clrMapOvr>
+    <a:masterClrMapping/>
+  </p:clrMapOvr>
+</p:sld>
+</file>
+
+<file path=ppt/slides/slide12.xml><?xml version="1.0" encoding="utf-8"?>
+<p:sld xmlns:a="http://schemas.openxmlformats.org/drawingml/2006/main" xmlns:r="http://schemas.openxmlformats.org/officeDocument/2006/relationships" xmlns:p="http://schemas.openxmlformats.org/presentationml/2006/main">
+  <p:cSld>
+    <p:spTree>
+      <p:nvGrpSpPr>
+        <p:cNvPr id="1" name="">
+          <a:extLst>
+            <a:ext uri="{FF2B5EF4-FFF2-40B4-BE49-F238E27FC236}">
+              <a16:creationId xmlns:a16="http://schemas.microsoft.com/office/drawing/2014/main" id="{AA96985E-0222-5EA0-FEDA-C8BBA2FEE079}"/>
+            </a:ext>
+          </a:extLst>
+        </p:cNvPr>
+        <p:cNvGrpSpPr/>
+        <p:nvPr/>
+      </p:nvGrpSpPr>
+      <p:grpSpPr>
+        <a:xfrm>
+          <a:off x="0" y="0"/>
+          <a:ext cx="0" cy="0"/>
+          <a:chOff x="0" y="0"/>
+          <a:chExt cx="0" cy="0"/>
+        </a:xfrm>
+      </p:grpSpPr>
+      <p:sp>
+        <p:nvSpPr>
+          <p:cNvPr id="2" name="标题 1">
+            <a:extLst>
+              <a:ext uri="{FF2B5EF4-FFF2-40B4-BE49-F238E27FC236}">
+                <a16:creationId xmlns:a16="http://schemas.microsoft.com/office/drawing/2014/main" id="{9EEB66FA-D0B6-4CED-AEE8-E1849517BEB7}"/>
+              </a:ext>
+            </a:extLst>
+          </p:cNvPr>
+          <p:cNvSpPr>
+            <a:spLocks noGrp="1"/>
+          </p:cNvSpPr>
+          <p:nvPr>
+            <p:ph type="title"/>
+          </p:nvPr>
+        </p:nvSpPr>
+        <p:spPr>
+          <a:xfrm>
+            <a:off x="838200" y="365126"/>
+            <a:ext cx="10515600" cy="865534"/>
+          </a:xfrm>
+        </p:spPr>
+        <p:txBody>
+          <a:bodyPr>
+            <a:normAutofit/>
+          </a:bodyPr>
+          <a:lstStyle/>
+          <a:p>
+            <a:r>
+              <a:rPr lang="zh-CN" altLang="en-US" sz="3200" dirty="0"/>
+              <a:t>残差学习框架</a:t>
+            </a:r>
+          </a:p>
+        </p:txBody>
+      </p:sp>
+      <p:pic>
+        <p:nvPicPr>
+          <p:cNvPr id="5" name="内容占位符 4">
+            <a:extLst>
+              <a:ext uri="{FF2B5EF4-FFF2-40B4-BE49-F238E27FC236}">
+                <a16:creationId xmlns:a16="http://schemas.microsoft.com/office/drawing/2014/main" id="{942A5405-E0D3-3223-7C33-1311380BD084}"/>
+              </a:ext>
+            </a:extLst>
+          </p:cNvPr>
+          <p:cNvPicPr>
+            <a:picLocks noGrp="1" noChangeAspect="1"/>
+          </p:cNvPicPr>
+          <p:nvPr>
+            <p:ph idx="1"/>
+          </p:nvPr>
+        </p:nvPicPr>
+        <p:blipFill>
+          <a:blip r:embed="rId2">
+            <a:extLst>
+              <a:ext uri="{28A0092B-C50C-407E-A947-70E740481C1C}">
+                <a14:useLocalDpi xmlns:a14="http://schemas.microsoft.com/office/drawing/2010/main" val="0"/>
+              </a:ext>
+            </a:extLst>
+          </a:blip>
+          <a:stretch>
+            <a:fillRect/>
+          </a:stretch>
+        </p:blipFill>
+        <p:spPr>
+          <a:xfrm>
+            <a:off x="10488266" y="310124"/>
+            <a:ext cx="865534" cy="865534"/>
+          </a:xfrm>
+        </p:spPr>
+      </p:pic>
+      <p:cxnSp>
+        <p:nvCxnSpPr>
+          <p:cNvPr id="7" name="直接连接符 6">
+            <a:extLst>
+              <a:ext uri="{FF2B5EF4-FFF2-40B4-BE49-F238E27FC236}">
+                <a16:creationId xmlns:a16="http://schemas.microsoft.com/office/drawing/2014/main" id="{E738912E-7D97-93CF-DCDD-9CE03F645118}"/>
+              </a:ext>
+            </a:extLst>
+          </p:cNvPr>
+          <p:cNvCxnSpPr/>
+          <p:nvPr/>
+        </p:nvCxnSpPr>
+        <p:spPr>
+          <a:xfrm>
+            <a:off x="893774" y="1236928"/>
+            <a:ext cx="10548000" cy="0"/>
+          </a:xfrm>
+          <a:prstGeom prst="line">
+            <a:avLst/>
+          </a:prstGeom>
+        </p:spPr>
+        <p:style>
+          <a:lnRef idx="1">
+            <a:schemeClr val="accent1"/>
+          </a:lnRef>
+          <a:fillRef idx="0">
+            <a:schemeClr val="accent1"/>
+          </a:fillRef>
+          <a:effectRef idx="0">
+            <a:schemeClr val="accent1"/>
+          </a:effectRef>
+          <a:fontRef idx="minor">
+            <a:schemeClr val="tx1"/>
+          </a:fontRef>
+        </p:style>
+      </p:cxnSp>
+      <p:pic>
+        <p:nvPicPr>
+          <p:cNvPr id="4" name="图片 3" descr="图示&#10;&#10;AI 生成的内容可能不正确。">
+            <a:extLst>
+              <a:ext uri="{FF2B5EF4-FFF2-40B4-BE49-F238E27FC236}">
+                <a16:creationId xmlns:a16="http://schemas.microsoft.com/office/drawing/2014/main" id="{7153143D-567A-2F34-56DA-571053B1C74F}"/>
+              </a:ext>
+            </a:extLst>
+          </p:cNvPr>
+          <p:cNvPicPr>
+            <a:picLocks/>
+          </p:cNvPicPr>
+          <p:nvPr/>
+        </p:nvPicPr>
+        <p:blipFill>
+          <a:blip r:embed="rId3"/>
+          <a:srcRect l="-154" t="14836"/>
+          <a:stretch>
+            <a:fillRect/>
+          </a:stretch>
+        </p:blipFill>
+        <p:spPr>
+          <a:xfrm>
+            <a:off x="2966550" y="1696538"/>
+            <a:ext cx="6258900" cy="3220873"/>
+          </a:xfrm>
+          <a:prstGeom prst="rect">
+            <a:avLst/>
+          </a:prstGeom>
+        </p:spPr>
+      </p:pic>
+    </p:spTree>
+    <p:extLst>
+      <p:ext uri="{BB962C8B-B14F-4D97-AF65-F5344CB8AC3E}">
+        <p14:creationId xmlns:p14="http://schemas.microsoft.com/office/powerpoint/2010/main" val="2976330680"/>
+      </p:ext>
+    </p:extLst>
+  </p:cSld>
+  <p:clrMapOvr>
+    <a:masterClrMapping/>
+  </p:clrMapOvr>
+</p:sld>
+</file>
+
+<file path=ppt/slides/slide13.xml><?xml version="1.0" encoding="utf-8"?>
+<p:sld xmlns:a="http://schemas.openxmlformats.org/drawingml/2006/main" xmlns:r="http://schemas.openxmlformats.org/officeDocument/2006/relationships" xmlns:p="http://schemas.openxmlformats.org/presentationml/2006/main">
+  <p:cSld>
+    <p:spTree>
+      <p:nvGrpSpPr>
+        <p:cNvPr id="1" name="">
+          <a:extLst>
+            <a:ext uri="{FF2B5EF4-FFF2-40B4-BE49-F238E27FC236}">
+              <a16:creationId xmlns:a16="http://schemas.microsoft.com/office/drawing/2014/main" id="{91C87675-1F99-B25A-5D60-5D167B9654B9}"/>
+            </a:ext>
+          </a:extLst>
+        </p:cNvPr>
+        <p:cNvGrpSpPr/>
+        <p:nvPr/>
+      </p:nvGrpSpPr>
+      <p:grpSpPr>
+        <a:xfrm>
+          <a:off x="0" y="0"/>
+          <a:ext cx="0" cy="0"/>
+          <a:chOff x="0" y="0"/>
+          <a:chExt cx="0" cy="0"/>
+        </a:xfrm>
+      </p:grpSpPr>
+      <p:sp>
+        <p:nvSpPr>
+          <p:cNvPr id="2" name="标题 1">
+            <a:extLst>
+              <a:ext uri="{FF2B5EF4-FFF2-40B4-BE49-F238E27FC236}">
+                <a16:creationId xmlns:a16="http://schemas.microsoft.com/office/drawing/2014/main" id="{A7F10E5C-E2B5-5CDB-EEDA-C72FECC68307}"/>
+              </a:ext>
+            </a:extLst>
+          </p:cNvPr>
+          <p:cNvSpPr>
+            <a:spLocks noGrp="1"/>
+          </p:cNvSpPr>
+          <p:nvPr>
+            <p:ph type="title"/>
+          </p:nvPr>
+        </p:nvSpPr>
+        <p:spPr>
+          <a:xfrm>
+            <a:off x="838200" y="3315359"/>
+            <a:ext cx="10515600" cy="865534"/>
+          </a:xfrm>
+        </p:spPr>
+        <p:txBody>
+          <a:bodyPr>
+            <a:normAutofit/>
+          </a:bodyPr>
+          <a:lstStyle/>
+          <a:p>
+            <a:pPr algn="ctr"/>
+            <a:r>
+              <a:rPr lang="zh-CN" altLang="en-US" sz="3200" dirty="0"/>
+              <a:t>实验</a:t>
+            </a:r>
+          </a:p>
+        </p:txBody>
+      </p:sp>
+      <p:pic>
+        <p:nvPicPr>
+          <p:cNvPr id="5" name="内容占位符 4">
+            <a:extLst>
+              <a:ext uri="{FF2B5EF4-FFF2-40B4-BE49-F238E27FC236}">
+                <a16:creationId xmlns:a16="http://schemas.microsoft.com/office/drawing/2014/main" id="{A3496220-2F08-CB66-424A-DA47279FDDFE}"/>
+              </a:ext>
+            </a:extLst>
+          </p:cNvPr>
+          <p:cNvPicPr>
+            <a:picLocks noGrp="1" noChangeAspect="1"/>
+          </p:cNvPicPr>
+          <p:nvPr>
+            <p:ph idx="1"/>
+          </p:nvPr>
+        </p:nvPicPr>
+        <p:blipFill>
+          <a:blip r:embed="rId2">
+            <a:extLst>
+              <a:ext uri="{28A0092B-C50C-407E-A947-70E740481C1C}">
+                <a14:useLocalDpi xmlns:a14="http://schemas.microsoft.com/office/drawing/2010/main" val="0"/>
+              </a:ext>
+            </a:extLst>
+          </a:blip>
+          <a:stretch>
+            <a:fillRect/>
+          </a:stretch>
+        </p:blipFill>
+        <p:spPr>
+          <a:xfrm>
+            <a:off x="10488266" y="310124"/>
+            <a:ext cx="865534" cy="865534"/>
+          </a:xfrm>
+        </p:spPr>
+      </p:pic>
+      <p:cxnSp>
+        <p:nvCxnSpPr>
+          <p:cNvPr id="7" name="直接连接符 6">
+            <a:extLst>
+              <a:ext uri="{FF2B5EF4-FFF2-40B4-BE49-F238E27FC236}">
+                <a16:creationId xmlns:a16="http://schemas.microsoft.com/office/drawing/2014/main" id="{F8C0D0EC-56C3-2E41-F52F-3717936B3284}"/>
+              </a:ext>
+            </a:extLst>
+          </p:cNvPr>
+          <p:cNvCxnSpPr/>
+          <p:nvPr/>
+        </p:nvCxnSpPr>
+        <p:spPr>
+          <a:xfrm>
+            <a:off x="893774" y="1236928"/>
+            <a:ext cx="10548000" cy="0"/>
+          </a:xfrm>
+          <a:prstGeom prst="line">
+            <a:avLst/>
+          </a:prstGeom>
+        </p:spPr>
+        <p:style>
+          <a:lnRef idx="1">
+            <a:schemeClr val="accent1"/>
+          </a:lnRef>
+          <a:fillRef idx="0">
+            <a:schemeClr val="accent1"/>
+          </a:fillRef>
+          <a:effectRef idx="0">
+            <a:schemeClr val="accent1"/>
+          </a:effectRef>
+          <a:fontRef idx="minor">
+            <a:schemeClr val="tx1"/>
+          </a:fontRef>
+        </p:style>
+      </p:cxnSp>
+    </p:spTree>
+    <p:extLst>
+      <p:ext uri="{BB962C8B-B14F-4D97-AF65-F5344CB8AC3E}">
+        <p14:creationId xmlns:p14="http://schemas.microsoft.com/office/powerpoint/2010/main" val="779260486"/>
+      </p:ext>
+    </p:extLst>
+  </p:cSld>
+  <p:clrMapOvr>
+    <a:masterClrMapping/>
+  </p:clrMapOvr>
+</p:sld>
+</file>
+
+<file path=ppt/slides/slide14.xml><?xml version="1.0" encoding="utf-8"?>
+<p:sld xmlns:a="http://schemas.openxmlformats.org/drawingml/2006/main" xmlns:r="http://schemas.openxmlformats.org/officeDocument/2006/relationships" xmlns:p="http://schemas.openxmlformats.org/presentationml/2006/main">
+  <p:cSld>
+    <p:spTree>
+      <p:nvGrpSpPr>
+        <p:cNvPr id="1" name="">
+          <a:extLst>
+            <a:ext uri="{FF2B5EF4-FFF2-40B4-BE49-F238E27FC236}">
+              <a16:creationId xmlns:a16="http://schemas.microsoft.com/office/drawing/2014/main" id="{E6EE242F-A9FA-9607-4E93-0C5BC8EA6A9B}"/>
+            </a:ext>
+          </a:extLst>
+        </p:cNvPr>
+        <p:cNvGrpSpPr/>
+        <p:nvPr/>
+      </p:nvGrpSpPr>
+      <p:grpSpPr>
+        <a:xfrm>
+          <a:off x="0" y="0"/>
+          <a:ext cx="0" cy="0"/>
+          <a:chOff x="0" y="0"/>
+          <a:chExt cx="0" cy="0"/>
+        </a:xfrm>
+      </p:grpSpPr>
+      <p:sp>
+        <p:nvSpPr>
+          <p:cNvPr id="2" name="标题 1">
+            <a:extLst>
+              <a:ext uri="{FF2B5EF4-FFF2-40B4-BE49-F238E27FC236}">
+                <a16:creationId xmlns:a16="http://schemas.microsoft.com/office/drawing/2014/main" id="{49098773-8DF9-A204-32D2-2B67E73C41E8}"/>
+              </a:ext>
+            </a:extLst>
+          </p:cNvPr>
+          <p:cNvSpPr>
+            <a:spLocks noGrp="1"/>
+          </p:cNvSpPr>
+          <p:nvPr>
+            <p:ph type="title"/>
+          </p:nvPr>
+        </p:nvSpPr>
+        <p:spPr>
+          <a:xfrm>
+            <a:off x="838200" y="365126"/>
+            <a:ext cx="10515600" cy="865534"/>
+          </a:xfrm>
+        </p:spPr>
+        <p:txBody>
+          <a:bodyPr>
+            <a:normAutofit/>
+          </a:bodyPr>
+          <a:lstStyle/>
+          <a:p>
+            <a:r>
+              <a:rPr lang="zh-CN" altLang="en-US" sz="3200" dirty="0"/>
+              <a:t>实验设置与基准</a:t>
+            </a:r>
+          </a:p>
+        </p:txBody>
+      </p:sp>
+      <p:pic>
+        <p:nvPicPr>
+          <p:cNvPr id="5" name="内容占位符 4">
+            <a:extLst>
+              <a:ext uri="{FF2B5EF4-FFF2-40B4-BE49-F238E27FC236}">
+                <a16:creationId xmlns:a16="http://schemas.microsoft.com/office/drawing/2014/main" id="{3FD92D55-4487-51FE-EEEA-D8897E2321E9}"/>
+              </a:ext>
+            </a:extLst>
+          </p:cNvPr>
+          <p:cNvPicPr>
+            <a:picLocks noGrp="1" noChangeAspect="1"/>
+          </p:cNvPicPr>
+          <p:nvPr>
+            <p:ph idx="1"/>
+          </p:nvPr>
+        </p:nvPicPr>
+        <p:blipFill>
+          <a:blip r:embed="rId2">
+            <a:extLst>
+              <a:ext uri="{28A0092B-C50C-407E-A947-70E740481C1C}">
+                <a14:useLocalDpi xmlns:a14="http://schemas.microsoft.com/office/drawing/2010/main" val="0"/>
+              </a:ext>
+            </a:extLst>
+          </a:blip>
+          <a:stretch>
+            <a:fillRect/>
+          </a:stretch>
+        </p:blipFill>
+        <p:spPr>
+          <a:xfrm>
+            <a:off x="10488266" y="310124"/>
+            <a:ext cx="865534" cy="865534"/>
+          </a:xfrm>
+        </p:spPr>
+      </p:pic>
+      <p:cxnSp>
+        <p:nvCxnSpPr>
+          <p:cNvPr id="7" name="直接连接符 6">
+            <a:extLst>
+              <a:ext uri="{FF2B5EF4-FFF2-40B4-BE49-F238E27FC236}">
+                <a16:creationId xmlns:a16="http://schemas.microsoft.com/office/drawing/2014/main" id="{89AA22BB-B64B-9C98-48FC-89127A3640C7}"/>
+              </a:ext>
+            </a:extLst>
+          </p:cNvPr>
+          <p:cNvCxnSpPr/>
+          <p:nvPr/>
+        </p:nvCxnSpPr>
+        <p:spPr>
+          <a:xfrm>
+            <a:off x="893774" y="1236928"/>
+            <a:ext cx="10548000" cy="0"/>
+          </a:xfrm>
+          <a:prstGeom prst="line">
+            <a:avLst/>
+          </a:prstGeom>
+        </p:spPr>
+        <p:style>
+          <a:lnRef idx="1">
+            <a:schemeClr val="accent1"/>
+          </a:lnRef>
+          <a:fillRef idx="0">
+            <a:schemeClr val="accent1"/>
+          </a:fillRef>
+          <a:effectRef idx="0">
+            <a:schemeClr val="accent1"/>
+          </a:effectRef>
+          <a:fontRef idx="minor">
+            <a:schemeClr val="tx1"/>
+          </a:fontRef>
+        </p:style>
+      </p:cxnSp>
+      <p:sp>
+        <p:nvSpPr>
+          <p:cNvPr id="4" name="文本框 3">
+            <a:extLst>
+              <a:ext uri="{FF2B5EF4-FFF2-40B4-BE49-F238E27FC236}">
+                <a16:creationId xmlns:a16="http://schemas.microsoft.com/office/drawing/2014/main" id="{3463C14A-D50E-E72F-EA9A-6A2902A1E93C}"/>
+              </a:ext>
+            </a:extLst>
+          </p:cNvPr>
+          <p:cNvSpPr txBox="1"/>
+          <p:nvPr/>
+        </p:nvSpPr>
+        <p:spPr>
+          <a:xfrm>
+            <a:off x="838200" y="1859339"/>
+            <a:ext cx="8039819" cy="3139321"/>
+          </a:xfrm>
+          <a:prstGeom prst="rect">
+            <a:avLst/>
+          </a:prstGeom>
+          <a:noFill/>
+        </p:spPr>
+        <p:txBody>
+          <a:bodyPr wrap="square" rtlCol="0">
+            <a:spAutoFit/>
+          </a:bodyPr>
+          <a:lstStyle/>
+          <a:p>
+            <a:pPr lvl="1"/>
+            <a:r>
+              <a:rPr lang="en-US" altLang="zh-CN" b="1" dirty="0"/>
+              <a:t>Dataset:</a:t>
+            </a:r>
+            <a:r>
+              <a:rPr lang="en-US" altLang="zh-CN" dirty="0"/>
+              <a:t> ImageNet 2012 classification dataset (1000 classes).</a:t>
+            </a:r>
+            <a:endParaRPr lang="zh-CN" altLang="zh-CN" dirty="0"/>
+          </a:p>
+          <a:p>
+            <a:pPr lvl="2"/>
+            <a:r>
+              <a:rPr lang="en-US" altLang="zh-CN" dirty="0"/>
+              <a:t>Training: 1.28 million images.</a:t>
+            </a:r>
+            <a:endParaRPr lang="zh-CN" altLang="zh-CN" dirty="0"/>
+          </a:p>
+          <a:p>
+            <a:pPr lvl="2"/>
+            <a:r>
+              <a:rPr lang="en-US" altLang="zh-CN" dirty="0"/>
+              <a:t>Validation: 50k images.</a:t>
+            </a:r>
+            <a:endParaRPr lang="zh-CN" altLang="zh-CN" dirty="0"/>
+          </a:p>
+          <a:p>
+            <a:pPr lvl="1"/>
+            <a:r>
+              <a:rPr lang="en-US" altLang="zh-CN" b="1" dirty="0"/>
+              <a:t>Training Settings:</a:t>
+            </a:r>
+            <a:endParaRPr lang="zh-CN" altLang="zh-CN" dirty="0"/>
+          </a:p>
+          <a:p>
+            <a:pPr lvl="2"/>
+            <a:r>
+              <a:rPr lang="en-US" altLang="zh-CN" dirty="0"/>
+              <a:t>Data Augmentation: Resize, Crop (224x224), Horizontal Flip, Color Augmentation .</a:t>
+            </a:r>
+            <a:endParaRPr lang="zh-CN" altLang="zh-CN" dirty="0"/>
+          </a:p>
+          <a:p>
+            <a:pPr lvl="2"/>
+            <a:r>
+              <a:rPr lang="en-US" altLang="zh-CN" b="1" dirty="0"/>
+              <a:t>Standard:</a:t>
+            </a:r>
+            <a:r>
+              <a:rPr lang="en-US" altLang="zh-CN" dirty="0"/>
+              <a:t> Batch Normalization (BN) after every convolution.</a:t>
+            </a:r>
+            <a:endParaRPr lang="zh-CN" altLang="zh-CN" dirty="0"/>
+          </a:p>
+          <a:p>
+            <a:pPr lvl="2"/>
+            <a:r>
+              <a:rPr lang="en-US" altLang="zh-CN" b="1" dirty="0"/>
+              <a:t>Optimizer:</a:t>
+            </a:r>
+            <a:r>
+              <a:rPr lang="en-US" altLang="zh-CN" dirty="0"/>
+              <a:t> SGD, Mini-batch 256, Momentum 0.9, Weight decay 0.0001.</a:t>
+            </a:r>
+            <a:endParaRPr lang="zh-CN" altLang="zh-CN" dirty="0"/>
+          </a:p>
+          <a:p>
+            <a:pPr lvl="2"/>
+            <a:r>
+              <a:rPr lang="en-US" altLang="zh-CN" b="1" dirty="0"/>
+              <a:t>No Dropout</a:t>
+            </a:r>
+            <a:r>
+              <a:rPr lang="en-US" altLang="zh-CN" dirty="0"/>
+              <a:t> used.</a:t>
+            </a:r>
+            <a:endParaRPr lang="zh-CN" altLang="zh-CN" dirty="0"/>
+          </a:p>
+          <a:p>
+            <a:endParaRPr lang="zh-CN" altLang="en-US" dirty="0"/>
+          </a:p>
+        </p:txBody>
+      </p:sp>
+    </p:spTree>
+    <p:extLst>
+      <p:ext uri="{BB962C8B-B14F-4D97-AF65-F5344CB8AC3E}">
+        <p14:creationId xmlns:p14="http://schemas.microsoft.com/office/powerpoint/2010/main" val="1385713773"/>
+      </p:ext>
+    </p:extLst>
+  </p:cSld>
+  <p:clrMapOvr>
+    <a:masterClrMapping/>
+  </p:clrMapOvr>
+</p:sld>
+</file>
+
+<file path=ppt/slides/slide15.xml><?xml version="1.0" encoding="utf-8"?>
+<p:sld xmlns:a="http://schemas.openxmlformats.org/drawingml/2006/main" xmlns:r="http://schemas.openxmlformats.org/officeDocument/2006/relationships" xmlns:p="http://schemas.openxmlformats.org/presentationml/2006/main">
+  <p:cSld>
+    <p:spTree>
+      <p:nvGrpSpPr>
+        <p:cNvPr id="1" name="">
+          <a:extLst>
+            <a:ext uri="{FF2B5EF4-FFF2-40B4-BE49-F238E27FC236}">
+              <a16:creationId xmlns:a16="http://schemas.microsoft.com/office/drawing/2014/main" id="{194256E1-4D6C-D222-9F8C-8FC5CAD14908}"/>
+            </a:ext>
+          </a:extLst>
+        </p:cNvPr>
+        <p:cNvGrpSpPr/>
+        <p:nvPr/>
+      </p:nvGrpSpPr>
+      <p:grpSpPr>
+        <a:xfrm>
+          <a:off x="0" y="0"/>
+          <a:ext cx="0" cy="0"/>
+          <a:chOff x="0" y="0"/>
+          <a:chExt cx="0" cy="0"/>
+        </a:xfrm>
+      </p:grpSpPr>
+      <p:sp>
+        <p:nvSpPr>
+          <p:cNvPr id="2" name="标题 1">
+            <a:extLst>
+              <a:ext uri="{FF2B5EF4-FFF2-40B4-BE49-F238E27FC236}">
+                <a16:creationId xmlns:a16="http://schemas.microsoft.com/office/drawing/2014/main" id="{B67553BB-0152-7E40-437E-0446F8ABE066}"/>
+              </a:ext>
+            </a:extLst>
+          </p:cNvPr>
+          <p:cNvSpPr>
+            <a:spLocks noGrp="1"/>
+          </p:cNvSpPr>
+          <p:nvPr>
+            <p:ph type="title"/>
+          </p:nvPr>
+        </p:nvSpPr>
+        <p:spPr>
+          <a:xfrm>
+            <a:off x="838200" y="365126"/>
+            <a:ext cx="10515600" cy="865534"/>
+          </a:xfrm>
+        </p:spPr>
+        <p:txBody>
+          <a:bodyPr>
+            <a:normAutofit/>
+          </a:bodyPr>
+          <a:lstStyle/>
+          <a:p>
+            <a:r>
+              <a:rPr lang="zh-CN" altLang="zh-CN" sz="3200" dirty="0"/>
+              <a:t>退化问题的解决</a:t>
+            </a:r>
+            <a:endParaRPr lang="zh-CN" altLang="en-US" sz="2000" dirty="0"/>
+          </a:p>
+        </p:txBody>
+      </p:sp>
+      <p:pic>
+        <p:nvPicPr>
+          <p:cNvPr id="5" name="内容占位符 4">
+            <a:extLst>
+              <a:ext uri="{FF2B5EF4-FFF2-40B4-BE49-F238E27FC236}">
+                <a16:creationId xmlns:a16="http://schemas.microsoft.com/office/drawing/2014/main" id="{60FCE6E9-D542-1D31-1EC3-9DC2D4167BD4}"/>
+              </a:ext>
+            </a:extLst>
+          </p:cNvPr>
+          <p:cNvPicPr>
+            <a:picLocks noGrp="1" noChangeAspect="1"/>
+          </p:cNvPicPr>
+          <p:nvPr>
+            <p:ph idx="1"/>
+          </p:nvPr>
+        </p:nvPicPr>
+        <p:blipFill>
+          <a:blip r:embed="rId2">
+            <a:extLst>
+              <a:ext uri="{28A0092B-C50C-407E-A947-70E740481C1C}">
+                <a14:useLocalDpi xmlns:a14="http://schemas.microsoft.com/office/drawing/2010/main" val="0"/>
+              </a:ext>
+            </a:extLst>
+          </a:blip>
+          <a:stretch>
+            <a:fillRect/>
+          </a:stretch>
+        </p:blipFill>
+        <p:spPr>
+          <a:xfrm>
+            <a:off x="10488266" y="310124"/>
+            <a:ext cx="865534" cy="865534"/>
+          </a:xfrm>
+        </p:spPr>
+      </p:pic>
+      <p:cxnSp>
+        <p:nvCxnSpPr>
+          <p:cNvPr id="7" name="直接连接符 6">
+            <a:extLst>
+              <a:ext uri="{FF2B5EF4-FFF2-40B4-BE49-F238E27FC236}">
+                <a16:creationId xmlns:a16="http://schemas.microsoft.com/office/drawing/2014/main" id="{A16C9AD1-D548-08AC-D03C-3AD803278C04}"/>
+              </a:ext>
+            </a:extLst>
+          </p:cNvPr>
+          <p:cNvCxnSpPr/>
+          <p:nvPr/>
+        </p:nvCxnSpPr>
+        <p:spPr>
+          <a:xfrm>
+            <a:off x="893774" y="1236928"/>
+            <a:ext cx="10548000" cy="0"/>
+          </a:xfrm>
+          <a:prstGeom prst="line">
+            <a:avLst/>
+          </a:prstGeom>
+        </p:spPr>
+        <p:style>
+          <a:lnRef idx="1">
+            <a:schemeClr val="accent1"/>
+          </a:lnRef>
+          <a:fillRef idx="0">
+            <a:schemeClr val="accent1"/>
+          </a:fillRef>
+          <a:effectRef idx="0">
+            <a:schemeClr val="accent1"/>
+          </a:effectRef>
+          <a:fontRef idx="minor">
+            <a:schemeClr val="tx1"/>
+          </a:fontRef>
+        </p:style>
+      </p:cxnSp>
+      <p:pic>
+        <p:nvPicPr>
+          <p:cNvPr id="4" name="图片 3" descr="图形用户界面, 应用程序&#10;&#10;AI 生成的内容可能不正确。">
+            <a:extLst>
+              <a:ext uri="{FF2B5EF4-FFF2-40B4-BE49-F238E27FC236}">
+                <a16:creationId xmlns:a16="http://schemas.microsoft.com/office/drawing/2014/main" id="{4E1043A3-28E6-06AA-4DF4-C12A4A18DBB3}"/>
+              </a:ext>
+            </a:extLst>
+          </p:cNvPr>
+          <p:cNvPicPr>
+            <a:picLocks noChangeAspect="1"/>
+          </p:cNvPicPr>
+          <p:nvPr/>
+        </p:nvPicPr>
+        <p:blipFill>
+          <a:blip r:embed="rId3"/>
+          <a:stretch>
+            <a:fillRect/>
+          </a:stretch>
+        </p:blipFill>
+        <p:spPr>
+          <a:xfrm>
+            <a:off x="599308" y="1566602"/>
+            <a:ext cx="10993384" cy="3724795"/>
+          </a:xfrm>
+          <a:prstGeom prst="rect">
+            <a:avLst/>
+          </a:prstGeom>
+        </p:spPr>
+      </p:pic>
+    </p:spTree>
+    <p:extLst>
+      <p:ext uri="{BB962C8B-B14F-4D97-AF65-F5344CB8AC3E}">
+        <p14:creationId xmlns:p14="http://schemas.microsoft.com/office/powerpoint/2010/main" val="2502049783"/>
+      </p:ext>
+    </p:extLst>
+  </p:cSld>
+  <p:clrMapOvr>
+    <a:masterClrMapping/>
+  </p:clrMapOvr>
+</p:sld>
+</file>
+
+<file path=ppt/slides/slide16.xml><?xml version="1.0" encoding="utf-8"?>
+<p:sld xmlns:a="http://schemas.openxmlformats.org/drawingml/2006/main" xmlns:r="http://schemas.openxmlformats.org/officeDocument/2006/relationships" xmlns:p="http://schemas.openxmlformats.org/presentationml/2006/main">
+  <p:cSld>
+    <p:spTree>
+      <p:nvGrpSpPr>
+        <p:cNvPr id="1" name="">
+          <a:extLst>
+            <a:ext uri="{FF2B5EF4-FFF2-40B4-BE49-F238E27FC236}">
+              <a16:creationId xmlns:a16="http://schemas.microsoft.com/office/drawing/2014/main" id="{B9A372C1-3084-F8E8-8EDB-C2FB2CA1BC30}"/>
+            </a:ext>
+          </a:extLst>
+        </p:cNvPr>
+        <p:cNvGrpSpPr/>
+        <p:nvPr/>
+      </p:nvGrpSpPr>
+      <p:grpSpPr>
+        <a:xfrm>
+          <a:off x="0" y="0"/>
+          <a:ext cx="0" cy="0"/>
+          <a:chOff x="0" y="0"/>
+          <a:chExt cx="0" cy="0"/>
+        </a:xfrm>
+      </p:grpSpPr>
+      <p:sp>
+        <p:nvSpPr>
+          <p:cNvPr id="2" name="标题 1">
+            <a:extLst>
+              <a:ext uri="{FF2B5EF4-FFF2-40B4-BE49-F238E27FC236}">
+                <a16:creationId xmlns:a16="http://schemas.microsoft.com/office/drawing/2014/main" id="{69A4D8B1-B788-7C7B-B28F-6E2DAE3A80DB}"/>
+              </a:ext>
+            </a:extLst>
+          </p:cNvPr>
+          <p:cNvSpPr>
+            <a:spLocks noGrp="1"/>
+          </p:cNvSpPr>
+          <p:nvPr>
+            <p:ph type="title"/>
+          </p:nvPr>
+        </p:nvSpPr>
+        <p:spPr>
+          <a:xfrm>
+            <a:off x="838200" y="365126"/>
+            <a:ext cx="10515600" cy="865534"/>
+          </a:xfrm>
+        </p:spPr>
+        <p:txBody>
+          <a:bodyPr>
+            <a:normAutofit/>
+          </a:bodyPr>
+          <a:lstStyle/>
+          <a:p>
+            <a:r>
+              <a:rPr lang="en-US" altLang="zh-CN" sz="3200" dirty="0"/>
+              <a:t>152</a:t>
+            </a:r>
+            <a:r>
+              <a:rPr lang="zh-CN" altLang="zh-CN" sz="3200" dirty="0"/>
+              <a:t>层与瓶颈结构</a:t>
+            </a:r>
+            <a:endParaRPr lang="zh-CN" altLang="en-US" sz="2000" dirty="0"/>
+          </a:p>
+        </p:txBody>
+      </p:sp>
+      <p:pic>
+        <p:nvPicPr>
+          <p:cNvPr id="5" name="内容占位符 4">
+            <a:extLst>
+              <a:ext uri="{FF2B5EF4-FFF2-40B4-BE49-F238E27FC236}">
+                <a16:creationId xmlns:a16="http://schemas.microsoft.com/office/drawing/2014/main" id="{AAC5BC8C-7995-DB27-9CC5-1B3E6066740A}"/>
+              </a:ext>
+            </a:extLst>
+          </p:cNvPr>
+          <p:cNvPicPr>
+            <a:picLocks noGrp="1" noChangeAspect="1"/>
+          </p:cNvPicPr>
+          <p:nvPr>
+            <p:ph idx="1"/>
+          </p:nvPr>
+        </p:nvPicPr>
+        <p:blipFill>
+          <a:blip r:embed="rId2">
+            <a:extLst>
+              <a:ext uri="{28A0092B-C50C-407E-A947-70E740481C1C}">
+                <a14:useLocalDpi xmlns:a14="http://schemas.microsoft.com/office/drawing/2010/main" val="0"/>
+              </a:ext>
+            </a:extLst>
+          </a:blip>
+          <a:stretch>
+            <a:fillRect/>
+          </a:stretch>
+        </p:blipFill>
+        <p:spPr>
+          <a:xfrm>
+            <a:off x="10488266" y="310124"/>
+            <a:ext cx="865534" cy="865534"/>
+          </a:xfrm>
+        </p:spPr>
+      </p:pic>
+      <p:cxnSp>
+        <p:nvCxnSpPr>
+          <p:cNvPr id="7" name="直接连接符 6">
+            <a:extLst>
+              <a:ext uri="{FF2B5EF4-FFF2-40B4-BE49-F238E27FC236}">
+                <a16:creationId xmlns:a16="http://schemas.microsoft.com/office/drawing/2014/main" id="{EF8F4D8D-E66D-49FD-64C5-614AFB9111EB}"/>
+              </a:ext>
+            </a:extLst>
+          </p:cNvPr>
+          <p:cNvCxnSpPr/>
+          <p:nvPr/>
+        </p:nvCxnSpPr>
+        <p:spPr>
+          <a:xfrm>
+            <a:off x="893774" y="1236928"/>
+            <a:ext cx="10548000" cy="0"/>
+          </a:xfrm>
+          <a:prstGeom prst="line">
+            <a:avLst/>
+          </a:prstGeom>
+        </p:spPr>
+        <p:style>
+          <a:lnRef idx="1">
+            <a:schemeClr val="accent1"/>
+          </a:lnRef>
+          <a:fillRef idx="0">
+            <a:schemeClr val="accent1"/>
+          </a:fillRef>
+          <a:effectRef idx="0">
+            <a:schemeClr val="accent1"/>
+          </a:effectRef>
+          <a:fontRef idx="minor">
+            <a:schemeClr val="tx1"/>
+          </a:fontRef>
+        </p:style>
+      </p:cxnSp>
+    </p:spTree>
+    <p:extLst>
+      <p:ext uri="{BB962C8B-B14F-4D97-AF65-F5344CB8AC3E}">
+        <p14:creationId xmlns:p14="http://schemas.microsoft.com/office/powerpoint/2010/main" val="881571411"/>
+      </p:ext>
+    </p:extLst>
+  </p:cSld>
+  <p:clrMapOvr>
+    <a:masterClrMapping/>
+  </p:clrMapOvr>
+</p:sld>
+</file>
+
+<file path=ppt/slides/slide17.xml><?xml version="1.0" encoding="utf-8"?>
+<p:sld xmlns:a="http://schemas.openxmlformats.org/drawingml/2006/main" xmlns:r="http://schemas.openxmlformats.org/officeDocument/2006/relationships" xmlns:p="http://schemas.openxmlformats.org/presentationml/2006/main">
+  <p:cSld>
+    <p:spTree>
+      <p:nvGrpSpPr>
+        <p:cNvPr id="1" name="">
+          <a:extLst>
+            <a:ext uri="{FF2B5EF4-FFF2-40B4-BE49-F238E27FC236}">
+              <a16:creationId xmlns:a16="http://schemas.microsoft.com/office/drawing/2014/main" id="{73D7782F-80F6-1D1F-61E1-E6C2D69A6512}"/>
+            </a:ext>
+          </a:extLst>
+        </p:cNvPr>
+        <p:cNvGrpSpPr/>
+        <p:nvPr/>
+      </p:nvGrpSpPr>
+      <p:grpSpPr>
+        <a:xfrm>
+          <a:off x="0" y="0"/>
+          <a:ext cx="0" cy="0"/>
+          <a:chOff x="0" y="0"/>
+          <a:chExt cx="0" cy="0"/>
+        </a:xfrm>
+      </p:grpSpPr>
+      <p:sp>
+        <p:nvSpPr>
+          <p:cNvPr id="2" name="标题 1">
+            <a:extLst>
+              <a:ext uri="{FF2B5EF4-FFF2-40B4-BE49-F238E27FC236}">
+                <a16:creationId xmlns:a16="http://schemas.microsoft.com/office/drawing/2014/main" id="{A8BAEB9F-10E9-0082-7C62-EBBC50A269A8}"/>
+              </a:ext>
+            </a:extLst>
+          </p:cNvPr>
+          <p:cNvSpPr>
+            <a:spLocks noGrp="1"/>
+          </p:cNvSpPr>
+          <p:nvPr>
+            <p:ph type="title"/>
+          </p:nvPr>
+        </p:nvSpPr>
+        <p:spPr>
+          <a:xfrm>
+            <a:off x="838200" y="365126"/>
+            <a:ext cx="10515600" cy="865534"/>
+          </a:xfrm>
+        </p:spPr>
+        <p:txBody>
+          <a:bodyPr>
+            <a:normAutofit/>
+          </a:bodyPr>
+          <a:lstStyle/>
+          <a:p>
+            <a:r>
+              <a:rPr lang="zh-CN" altLang="en-US" sz="3200" dirty="0"/>
+              <a:t>目录</a:t>
+            </a:r>
+          </a:p>
+        </p:txBody>
+      </p:sp>
+      <p:pic>
+        <p:nvPicPr>
+          <p:cNvPr id="5" name="内容占位符 4">
+            <a:extLst>
+              <a:ext uri="{FF2B5EF4-FFF2-40B4-BE49-F238E27FC236}">
+                <a16:creationId xmlns:a16="http://schemas.microsoft.com/office/drawing/2014/main" id="{405AD640-9FC3-2F31-DD31-2CE4125D631E}"/>
+              </a:ext>
+            </a:extLst>
+          </p:cNvPr>
+          <p:cNvPicPr>
+            <a:picLocks noGrp="1" noChangeAspect="1"/>
+          </p:cNvPicPr>
+          <p:nvPr>
+            <p:ph idx="1"/>
+          </p:nvPr>
+        </p:nvPicPr>
+        <p:blipFill>
+          <a:blip r:embed="rId2">
+            <a:extLst>
+              <a:ext uri="{28A0092B-C50C-407E-A947-70E740481C1C}">
+                <a14:useLocalDpi xmlns:a14="http://schemas.microsoft.com/office/drawing/2010/main" val="0"/>
+              </a:ext>
+            </a:extLst>
+          </a:blip>
+          <a:stretch>
+            <a:fillRect/>
+          </a:stretch>
+        </p:blipFill>
+        <p:spPr>
+          <a:xfrm>
+            <a:off x="10488266" y="310124"/>
+            <a:ext cx="865534" cy="865534"/>
+          </a:xfrm>
+        </p:spPr>
+      </p:pic>
+      <p:cxnSp>
+        <p:nvCxnSpPr>
+          <p:cNvPr id="7" name="直接连接符 6">
+            <a:extLst>
+              <a:ext uri="{FF2B5EF4-FFF2-40B4-BE49-F238E27FC236}">
+                <a16:creationId xmlns:a16="http://schemas.microsoft.com/office/drawing/2014/main" id="{D2B227EA-409D-5E9A-D6A7-6CD85964473E}"/>
+              </a:ext>
+            </a:extLst>
+          </p:cNvPr>
+          <p:cNvCxnSpPr/>
+          <p:nvPr/>
+        </p:nvCxnSpPr>
+        <p:spPr>
+          <a:xfrm>
+            <a:off x="893774" y="1236928"/>
+            <a:ext cx="10548000" cy="0"/>
+          </a:xfrm>
+          <a:prstGeom prst="line">
+            <a:avLst/>
+          </a:prstGeom>
+        </p:spPr>
+        <p:style>
+          <a:lnRef idx="1">
+            <a:schemeClr val="accent1"/>
+          </a:lnRef>
+          <a:fillRef idx="0">
+            <a:schemeClr val="accent1"/>
+          </a:fillRef>
+          <a:effectRef idx="0">
+            <a:schemeClr val="accent1"/>
+          </a:effectRef>
+          <a:fontRef idx="minor">
+            <a:schemeClr val="tx1"/>
+          </a:fontRef>
+        </p:style>
+      </p:cxnSp>
+    </p:spTree>
+    <p:extLst>
+      <p:ext uri="{BB962C8B-B14F-4D97-AF65-F5344CB8AC3E}">
+        <p14:creationId xmlns:p14="http://schemas.microsoft.com/office/powerpoint/2010/main" val="1773135142"/>
       </p:ext>
     </p:extLst>
   </p:cSld>
@@ -6628,7 +8040,7 @@
           <p:nvPr>
             <p:extLst>
               <p:ext uri="{D42A27DB-BD31-4B8C-83A1-F6EECF244321}">
-                <p14:modId xmlns:p14="http://schemas.microsoft.com/office/powerpoint/2010/main" val="2550714922"/>
+                <p14:modId xmlns:p14="http://schemas.microsoft.com/office/powerpoint/2010/main" val="1901453844"/>
               </p:ext>
             </p:extLst>
           </p:nvPr>
@@ -6710,7 +8122,7 @@
             <a:pPr algn="ctr"/>
             <a:r>
               <a:rPr lang="zh-CN" altLang="en-US" sz="3200" dirty="0"/>
-              <a:t>相关概念</a:t>
+              <a:t>任务背景</a:t>
             </a:r>
           </a:p>
         </p:txBody>
@@ -6790,6 +8202,1283 @@
     <p:extLst>
       <p:ext uri="{BB962C8B-B14F-4D97-AF65-F5344CB8AC3E}">
         <p14:creationId xmlns:p14="http://schemas.microsoft.com/office/powerpoint/2010/main" val="4042339693"/>
+      </p:ext>
+    </p:extLst>
+  </p:cSld>
+  <p:clrMapOvr>
+    <a:masterClrMapping/>
+  </p:clrMapOvr>
+</p:sld>
+</file>
+
+<file path=ppt/slides/slide4.xml><?xml version="1.0" encoding="utf-8"?>
+<p:sld xmlns:a="http://schemas.openxmlformats.org/drawingml/2006/main" xmlns:r="http://schemas.openxmlformats.org/officeDocument/2006/relationships" xmlns:p="http://schemas.openxmlformats.org/presentationml/2006/main">
+  <p:cSld>
+    <p:spTree>
+      <p:nvGrpSpPr>
+        <p:cNvPr id="1" name="">
+          <a:extLst>
+            <a:ext uri="{FF2B5EF4-FFF2-40B4-BE49-F238E27FC236}">
+              <a16:creationId xmlns:a16="http://schemas.microsoft.com/office/drawing/2014/main" id="{1040C98E-E1DC-00D1-CEB4-E5F1530A4249}"/>
+            </a:ext>
+          </a:extLst>
+        </p:cNvPr>
+        <p:cNvGrpSpPr/>
+        <p:nvPr/>
+      </p:nvGrpSpPr>
+      <p:grpSpPr>
+        <a:xfrm>
+          <a:off x="0" y="0"/>
+          <a:ext cx="0" cy="0"/>
+          <a:chOff x="0" y="0"/>
+          <a:chExt cx="0" cy="0"/>
+        </a:xfrm>
+      </p:grpSpPr>
+      <p:sp>
+        <p:nvSpPr>
+          <p:cNvPr id="2" name="标题 1">
+            <a:extLst>
+              <a:ext uri="{FF2B5EF4-FFF2-40B4-BE49-F238E27FC236}">
+                <a16:creationId xmlns:a16="http://schemas.microsoft.com/office/drawing/2014/main" id="{DB5A17DC-C7FF-339E-4EEC-CC89841931CB}"/>
+              </a:ext>
+            </a:extLst>
+          </p:cNvPr>
+          <p:cNvSpPr>
+            <a:spLocks noGrp="1"/>
+          </p:cNvSpPr>
+          <p:nvPr>
+            <p:ph type="title"/>
+          </p:nvPr>
+        </p:nvSpPr>
+        <p:spPr>
+          <a:xfrm>
+            <a:off x="838200" y="365126"/>
+            <a:ext cx="10515600" cy="865534"/>
+          </a:xfrm>
+        </p:spPr>
+        <p:txBody>
+          <a:bodyPr>
+            <a:normAutofit/>
+          </a:bodyPr>
+          <a:lstStyle/>
+          <a:p>
+            <a:r>
+              <a:rPr lang="zh-CN" altLang="en-US" sz="3200" dirty="0"/>
+              <a:t>深度神经网络</a:t>
+            </a:r>
+          </a:p>
+        </p:txBody>
+      </p:sp>
+      <p:pic>
+        <p:nvPicPr>
+          <p:cNvPr id="5" name="内容占位符 4">
+            <a:extLst>
+              <a:ext uri="{FF2B5EF4-FFF2-40B4-BE49-F238E27FC236}">
+                <a16:creationId xmlns:a16="http://schemas.microsoft.com/office/drawing/2014/main" id="{C0FD44A0-9614-5682-7665-EDFA2CEE21BD}"/>
+              </a:ext>
+            </a:extLst>
+          </p:cNvPr>
+          <p:cNvPicPr>
+            <a:picLocks noGrp="1" noChangeAspect="1"/>
+          </p:cNvPicPr>
+          <p:nvPr>
+            <p:ph idx="1"/>
+          </p:nvPr>
+        </p:nvPicPr>
+        <p:blipFill>
+          <a:blip r:embed="rId2">
+            <a:extLst>
+              <a:ext uri="{28A0092B-C50C-407E-A947-70E740481C1C}">
+                <a14:useLocalDpi xmlns:a14="http://schemas.microsoft.com/office/drawing/2010/main" val="0"/>
+              </a:ext>
+            </a:extLst>
+          </a:blip>
+          <a:stretch>
+            <a:fillRect/>
+          </a:stretch>
+        </p:blipFill>
+        <p:spPr>
+          <a:xfrm>
+            <a:off x="10488266" y="310124"/>
+            <a:ext cx="865534" cy="865534"/>
+          </a:xfrm>
+        </p:spPr>
+      </p:pic>
+      <p:cxnSp>
+        <p:nvCxnSpPr>
+          <p:cNvPr id="7" name="直接连接符 6">
+            <a:extLst>
+              <a:ext uri="{FF2B5EF4-FFF2-40B4-BE49-F238E27FC236}">
+                <a16:creationId xmlns:a16="http://schemas.microsoft.com/office/drawing/2014/main" id="{0E8FA8B5-F60E-5308-C863-C42153FD77A4}"/>
+              </a:ext>
+            </a:extLst>
+          </p:cNvPr>
+          <p:cNvCxnSpPr/>
+          <p:nvPr/>
+        </p:nvCxnSpPr>
+        <p:spPr>
+          <a:xfrm>
+            <a:off x="893774" y="1236928"/>
+            <a:ext cx="10548000" cy="0"/>
+          </a:xfrm>
+          <a:prstGeom prst="line">
+            <a:avLst/>
+          </a:prstGeom>
+        </p:spPr>
+        <p:style>
+          <a:lnRef idx="1">
+            <a:schemeClr val="accent1"/>
+          </a:lnRef>
+          <a:fillRef idx="0">
+            <a:schemeClr val="accent1"/>
+          </a:fillRef>
+          <a:effectRef idx="0">
+            <a:schemeClr val="accent1"/>
+          </a:effectRef>
+          <a:fontRef idx="minor">
+            <a:schemeClr val="tx1"/>
+          </a:fontRef>
+        </p:style>
+      </p:cxnSp>
+      <p:sp>
+        <p:nvSpPr>
+          <p:cNvPr id="4" name="文本框 3">
+            <a:extLst>
+              <a:ext uri="{FF2B5EF4-FFF2-40B4-BE49-F238E27FC236}">
+                <a16:creationId xmlns:a16="http://schemas.microsoft.com/office/drawing/2014/main" id="{20025A98-82F9-3BBC-F3C1-EBD8D17EE1A8}"/>
+              </a:ext>
+            </a:extLst>
+          </p:cNvPr>
+          <p:cNvSpPr txBox="1"/>
+          <p:nvPr/>
+        </p:nvSpPr>
+        <p:spPr>
+          <a:xfrm>
+            <a:off x="608026" y="2218289"/>
+            <a:ext cx="10975948" cy="2862322"/>
+          </a:xfrm>
+          <a:prstGeom prst="rect">
+            <a:avLst/>
+          </a:prstGeom>
+          <a:noFill/>
+        </p:spPr>
+        <p:txBody>
+          <a:bodyPr wrap="square">
+            <a:spAutoFit/>
+          </a:bodyPr>
+          <a:lstStyle/>
+          <a:p>
+            <a:pPr>
+              <a:buNone/>
+            </a:pPr>
+            <a:r>
+              <a:rPr lang="zh-CN" altLang="en-US" dirty="0"/>
+              <a:t>深度卷积神经网络是一种多层架构，旨在确保网络对输入的</a:t>
+            </a:r>
+            <a:r>
+              <a:rPr lang="zh-CN" altLang="en-US" b="1" dirty="0"/>
+              <a:t>平移、缩放和变形 </a:t>
+            </a:r>
+            <a:r>
+              <a:rPr lang="en-US" altLang="zh-CN" b="1" dirty="0"/>
+              <a:t>(Shift, scale, and distortion)</a:t>
+            </a:r>
+            <a:r>
+              <a:rPr lang="en-US" altLang="zh-CN" dirty="0"/>
+              <a:t> </a:t>
+            </a:r>
+            <a:r>
+              <a:rPr lang="zh-CN" altLang="en-US" dirty="0"/>
+              <a:t>具有一定程度的不变性。 它结合了三个核心架构思想：</a:t>
+            </a:r>
+            <a:endParaRPr lang="en-US" altLang="zh-CN" dirty="0"/>
+          </a:p>
+          <a:p>
+            <a:pPr>
+              <a:buNone/>
+            </a:pPr>
+            <a:endParaRPr lang="zh-CN" altLang="en-US" dirty="0"/>
+          </a:p>
+          <a:p>
+            <a:pPr>
+              <a:buFont typeface="+mj-lt"/>
+              <a:buAutoNum type="arabicPeriod"/>
+            </a:pPr>
+            <a:r>
+              <a:rPr lang="zh-CN" altLang="en-US" b="1" dirty="0"/>
+              <a:t>局部感受野 </a:t>
+            </a:r>
+            <a:r>
+              <a:rPr lang="en-US" altLang="zh-CN" b="1" dirty="0"/>
+              <a:t>(Local Receptive Fields)</a:t>
+            </a:r>
+            <a:r>
+              <a:rPr lang="en-US" altLang="zh-CN" dirty="0"/>
+              <a:t>: </a:t>
+            </a:r>
+            <a:r>
+              <a:rPr lang="zh-CN" altLang="en-US" dirty="0"/>
+              <a:t>用于提取初级的视觉特征（如边缘、角点）。</a:t>
+            </a:r>
+            <a:endParaRPr lang="en-US" altLang="zh-CN" dirty="0"/>
+          </a:p>
+          <a:p>
+            <a:pPr>
+              <a:buFont typeface="+mj-lt"/>
+              <a:buAutoNum type="arabicPeriod"/>
+            </a:pPr>
+            <a:endParaRPr lang="zh-CN" altLang="en-US" dirty="0"/>
+          </a:p>
+          <a:p>
+            <a:pPr>
+              <a:buFont typeface="+mj-lt"/>
+              <a:buAutoNum type="arabicPeriod"/>
+            </a:pPr>
+            <a:r>
+              <a:rPr lang="zh-CN" altLang="en-US" b="1" dirty="0"/>
+              <a:t>权值共享 </a:t>
+            </a:r>
+            <a:r>
+              <a:rPr lang="en-US" altLang="zh-CN" b="1" dirty="0"/>
+              <a:t>(Shared Weights)</a:t>
+            </a:r>
+            <a:r>
+              <a:rPr lang="en-US" altLang="zh-CN" dirty="0"/>
+              <a:t>: </a:t>
+            </a:r>
+            <a:r>
+              <a:rPr lang="zh-CN" altLang="en-US" dirty="0"/>
+              <a:t>减少自由参数的数量，从而提高泛化能力。</a:t>
+            </a:r>
+            <a:endParaRPr lang="en-US" altLang="zh-CN" dirty="0"/>
+          </a:p>
+          <a:p>
+            <a:pPr>
+              <a:buFont typeface="+mj-lt"/>
+              <a:buAutoNum type="arabicPeriod"/>
+            </a:pPr>
+            <a:endParaRPr lang="zh-CN" altLang="en-US" dirty="0"/>
+          </a:p>
+          <a:p>
+            <a:pPr>
+              <a:buFont typeface="+mj-lt"/>
+              <a:buAutoNum type="arabicPeriod"/>
+            </a:pPr>
+            <a:r>
+              <a:rPr lang="zh-CN" altLang="en-US" b="1" dirty="0"/>
+              <a:t>空间下采样 </a:t>
+            </a:r>
+            <a:r>
+              <a:rPr lang="en-US" altLang="zh-CN" b="1" dirty="0"/>
+              <a:t>(Spatial Subsampling)</a:t>
+            </a:r>
+            <a:r>
+              <a:rPr lang="en-US" altLang="zh-CN" dirty="0"/>
+              <a:t>: </a:t>
+            </a:r>
+            <a:r>
+              <a:rPr lang="zh-CN" altLang="en-US" dirty="0"/>
+              <a:t>即池化 </a:t>
+            </a:r>
+            <a:r>
+              <a:rPr lang="en-US" altLang="zh-CN" dirty="0"/>
+              <a:t>(Pooling)</a:t>
+            </a:r>
+            <a:r>
+              <a:rPr lang="zh-CN" altLang="en-US" dirty="0"/>
+              <a:t>，用于降低特征图的空间分辨率并获得平移不变性。</a:t>
+            </a:r>
+            <a:endParaRPr lang="en-US" altLang="zh-CN" dirty="0"/>
+          </a:p>
+          <a:p>
+            <a:pPr algn="r"/>
+            <a:r>
+              <a:rPr lang="en-US" altLang="zh-CN" dirty="0"/>
+              <a:t> </a:t>
+            </a:r>
+          </a:p>
+          <a:p>
+            <a:pPr algn="r"/>
+            <a:r>
+              <a:rPr lang="en-US" altLang="zh-CN" dirty="0"/>
+              <a:t>LeCun, Y., et al. (1998). </a:t>
+            </a:r>
+            <a:r>
+              <a:rPr lang="en-US" altLang="zh-CN" i="1" dirty="0"/>
+              <a:t>"Gradient-based learning applied to document recognition"</a:t>
+            </a:r>
+            <a:r>
+              <a:rPr lang="en-US" altLang="zh-CN" dirty="0"/>
+              <a:t>. Proceedings of the IEEE.</a:t>
+            </a:r>
+            <a:endParaRPr lang="zh-CN" altLang="en-US" dirty="0"/>
+          </a:p>
+        </p:txBody>
+      </p:sp>
+    </p:spTree>
+    <p:extLst>
+      <p:ext uri="{BB962C8B-B14F-4D97-AF65-F5344CB8AC3E}">
+        <p14:creationId xmlns:p14="http://schemas.microsoft.com/office/powerpoint/2010/main" val="658392358"/>
+      </p:ext>
+    </p:extLst>
+  </p:cSld>
+  <p:clrMapOvr>
+    <a:masterClrMapping/>
+  </p:clrMapOvr>
+</p:sld>
+</file>
+
+<file path=ppt/slides/slide5.xml><?xml version="1.0" encoding="utf-8"?>
+<p:sld xmlns:a="http://schemas.openxmlformats.org/drawingml/2006/main" xmlns:r="http://schemas.openxmlformats.org/officeDocument/2006/relationships" xmlns:p="http://schemas.openxmlformats.org/presentationml/2006/main">
+  <p:cSld>
+    <p:spTree>
+      <p:nvGrpSpPr>
+        <p:cNvPr id="1" name="">
+          <a:extLst>
+            <a:ext uri="{FF2B5EF4-FFF2-40B4-BE49-F238E27FC236}">
+              <a16:creationId xmlns:a16="http://schemas.microsoft.com/office/drawing/2014/main" id="{68AEEF87-B44E-7D24-3254-0464DF820F60}"/>
+            </a:ext>
+          </a:extLst>
+        </p:cNvPr>
+        <p:cNvGrpSpPr/>
+        <p:nvPr/>
+      </p:nvGrpSpPr>
+      <p:grpSpPr>
+        <a:xfrm>
+          <a:off x="0" y="0"/>
+          <a:ext cx="0" cy="0"/>
+          <a:chOff x="0" y="0"/>
+          <a:chExt cx="0" cy="0"/>
+        </a:xfrm>
+      </p:grpSpPr>
+      <p:sp>
+        <p:nvSpPr>
+          <p:cNvPr id="2" name="标题 1">
+            <a:extLst>
+              <a:ext uri="{FF2B5EF4-FFF2-40B4-BE49-F238E27FC236}">
+                <a16:creationId xmlns:a16="http://schemas.microsoft.com/office/drawing/2014/main" id="{72B09F9D-9104-779B-AF20-BEF86EC75D8A}"/>
+              </a:ext>
+            </a:extLst>
+          </p:cNvPr>
+          <p:cNvSpPr>
+            <a:spLocks noGrp="1"/>
+          </p:cNvSpPr>
+          <p:nvPr>
+            <p:ph type="title"/>
+          </p:nvPr>
+        </p:nvSpPr>
+        <p:spPr>
+          <a:xfrm>
+            <a:off x="838200" y="365126"/>
+            <a:ext cx="10515600" cy="865534"/>
+          </a:xfrm>
+        </p:spPr>
+        <p:txBody>
+          <a:bodyPr>
+            <a:normAutofit/>
+          </a:bodyPr>
+          <a:lstStyle/>
+          <a:p>
+            <a:r>
+              <a:rPr lang="zh-CN" altLang="zh-CN" sz="3200" dirty="0"/>
+              <a:t>梯度消失</a:t>
+            </a:r>
+            <a:r>
+              <a:rPr lang="en-US" altLang="zh-CN" sz="3200" dirty="0"/>
+              <a:t>/</a:t>
+            </a:r>
+            <a:r>
+              <a:rPr lang="zh-CN" altLang="zh-CN" sz="3200" dirty="0"/>
+              <a:t>爆炸</a:t>
+            </a:r>
+            <a:endParaRPr lang="zh-CN" altLang="en-US" sz="2000" dirty="0"/>
+          </a:p>
+        </p:txBody>
+      </p:sp>
+      <p:pic>
+        <p:nvPicPr>
+          <p:cNvPr id="5" name="内容占位符 4">
+            <a:extLst>
+              <a:ext uri="{FF2B5EF4-FFF2-40B4-BE49-F238E27FC236}">
+                <a16:creationId xmlns:a16="http://schemas.microsoft.com/office/drawing/2014/main" id="{5135B03D-DB4B-C976-5EBC-657AFB69C44D}"/>
+              </a:ext>
+            </a:extLst>
+          </p:cNvPr>
+          <p:cNvPicPr>
+            <a:picLocks noGrp="1" noChangeAspect="1"/>
+          </p:cNvPicPr>
+          <p:nvPr>
+            <p:ph idx="1"/>
+          </p:nvPr>
+        </p:nvPicPr>
+        <p:blipFill>
+          <a:blip r:embed="rId2">
+            <a:extLst>
+              <a:ext uri="{28A0092B-C50C-407E-A947-70E740481C1C}">
+                <a14:useLocalDpi xmlns:a14="http://schemas.microsoft.com/office/drawing/2010/main" val="0"/>
+              </a:ext>
+            </a:extLst>
+          </a:blip>
+          <a:stretch>
+            <a:fillRect/>
+          </a:stretch>
+        </p:blipFill>
+        <p:spPr>
+          <a:xfrm>
+            <a:off x="10488266" y="310124"/>
+            <a:ext cx="865534" cy="865534"/>
+          </a:xfrm>
+        </p:spPr>
+      </p:pic>
+      <p:cxnSp>
+        <p:nvCxnSpPr>
+          <p:cNvPr id="7" name="直接连接符 6">
+            <a:extLst>
+              <a:ext uri="{FF2B5EF4-FFF2-40B4-BE49-F238E27FC236}">
+                <a16:creationId xmlns:a16="http://schemas.microsoft.com/office/drawing/2014/main" id="{10442256-3215-6EC4-2648-A2FA305F6BDA}"/>
+              </a:ext>
+            </a:extLst>
+          </p:cNvPr>
+          <p:cNvCxnSpPr/>
+          <p:nvPr/>
+        </p:nvCxnSpPr>
+        <p:spPr>
+          <a:xfrm>
+            <a:off x="893774" y="1236928"/>
+            <a:ext cx="10548000" cy="0"/>
+          </a:xfrm>
+          <a:prstGeom prst="line">
+            <a:avLst/>
+          </a:prstGeom>
+        </p:spPr>
+        <p:style>
+          <a:lnRef idx="1">
+            <a:schemeClr val="accent1"/>
+          </a:lnRef>
+          <a:fillRef idx="0">
+            <a:schemeClr val="accent1"/>
+          </a:fillRef>
+          <a:effectRef idx="0">
+            <a:schemeClr val="accent1"/>
+          </a:effectRef>
+          <a:fontRef idx="minor">
+            <a:schemeClr val="tx1"/>
+          </a:fontRef>
+        </p:style>
+      </p:cxnSp>
+      <p:sp>
+        <p:nvSpPr>
+          <p:cNvPr id="4" name="文本框 3">
+            <a:extLst>
+              <a:ext uri="{FF2B5EF4-FFF2-40B4-BE49-F238E27FC236}">
+                <a16:creationId xmlns:a16="http://schemas.microsoft.com/office/drawing/2014/main" id="{56E69C54-999C-0613-4102-8691EF082C72}"/>
+              </a:ext>
+            </a:extLst>
+          </p:cNvPr>
+          <p:cNvSpPr txBox="1"/>
+          <p:nvPr/>
+        </p:nvSpPr>
+        <p:spPr>
+          <a:xfrm>
+            <a:off x="1331343" y="1921623"/>
+            <a:ext cx="9529313" cy="646331"/>
+          </a:xfrm>
+          <a:prstGeom prst="rect">
+            <a:avLst/>
+          </a:prstGeom>
+          <a:noFill/>
+        </p:spPr>
+        <p:txBody>
+          <a:bodyPr wrap="square">
+            <a:spAutoFit/>
+          </a:bodyPr>
+          <a:lstStyle/>
+          <a:p>
+            <a:r>
+              <a:rPr lang="zh-CN" altLang="en-US" dirty="0"/>
+              <a:t>梯度消失与爆炸是指在训练深度神经网络（尤其是 </a:t>
+            </a:r>
+            <a:r>
+              <a:rPr lang="en-US" altLang="zh-CN" dirty="0"/>
+              <a:t>RNN</a:t>
+            </a:r>
+            <a:r>
+              <a:rPr lang="zh-CN" altLang="en-US" dirty="0"/>
+              <a:t>）时，损失函数关于参数的梯度范数随着时间步（或层数）的增加而呈指数级衰减或增长的现象。</a:t>
+            </a:r>
+          </a:p>
+        </p:txBody>
+      </p:sp>
+      <p:pic>
+        <p:nvPicPr>
+          <p:cNvPr id="8" name="图片 7" descr="图示&#10;&#10;AI 生成的内容可能不正确。">
+            <a:extLst>
+              <a:ext uri="{FF2B5EF4-FFF2-40B4-BE49-F238E27FC236}">
+                <a16:creationId xmlns:a16="http://schemas.microsoft.com/office/drawing/2014/main" id="{F9E642DC-1540-DF27-4B39-8C3DB7736BD3}"/>
+              </a:ext>
+            </a:extLst>
+          </p:cNvPr>
+          <p:cNvPicPr>
+            <a:picLocks/>
+          </p:cNvPicPr>
+          <p:nvPr/>
+        </p:nvPicPr>
+        <p:blipFill>
+          <a:blip r:embed="rId3"/>
+          <a:srcRect l="6621" t="24295" r="13456" b="7893"/>
+          <a:stretch>
+            <a:fillRect/>
+          </a:stretch>
+        </p:blipFill>
+        <p:spPr>
+          <a:xfrm>
+            <a:off x="1331343" y="1298199"/>
+            <a:ext cx="2777705" cy="646331"/>
+          </a:xfrm>
+          <a:prstGeom prst="rect">
+            <a:avLst/>
+          </a:prstGeom>
+        </p:spPr>
+      </p:pic>
+      <p:pic>
+        <p:nvPicPr>
+          <p:cNvPr id="10" name="图片 9" descr="文本&#10;&#10;AI 生成的内容可能不正确。">
+            <a:extLst>
+              <a:ext uri="{FF2B5EF4-FFF2-40B4-BE49-F238E27FC236}">
+                <a16:creationId xmlns:a16="http://schemas.microsoft.com/office/drawing/2014/main" id="{08F35C5B-250D-8BFA-EA9B-D9CDE5E91FC5}"/>
+              </a:ext>
+            </a:extLst>
+          </p:cNvPr>
+          <p:cNvPicPr>
+            <a:picLocks noChangeAspect="1"/>
+          </p:cNvPicPr>
+          <p:nvPr/>
+        </p:nvPicPr>
+        <p:blipFill>
+          <a:blip r:embed="rId4"/>
+          <a:stretch>
+            <a:fillRect/>
+          </a:stretch>
+        </p:blipFill>
+        <p:spPr>
+          <a:xfrm>
+            <a:off x="1331343" y="2772638"/>
+            <a:ext cx="9235944" cy="3179587"/>
+          </a:xfrm>
+          <a:prstGeom prst="rect">
+            <a:avLst/>
+          </a:prstGeom>
+        </p:spPr>
+      </p:pic>
+    </p:spTree>
+    <p:extLst>
+      <p:ext uri="{BB962C8B-B14F-4D97-AF65-F5344CB8AC3E}">
+        <p14:creationId xmlns:p14="http://schemas.microsoft.com/office/powerpoint/2010/main" val="2175096640"/>
+      </p:ext>
+    </p:extLst>
+  </p:cSld>
+  <p:clrMapOvr>
+    <a:masterClrMapping/>
+  </p:clrMapOvr>
+</p:sld>
+</file>
+
+<file path=ppt/slides/slide6.xml><?xml version="1.0" encoding="utf-8"?>
+<p:sld xmlns:a="http://schemas.openxmlformats.org/drawingml/2006/main" xmlns:r="http://schemas.openxmlformats.org/officeDocument/2006/relationships" xmlns:p="http://schemas.openxmlformats.org/presentationml/2006/main">
+  <p:cSld>
+    <p:spTree>
+      <p:nvGrpSpPr>
+        <p:cNvPr id="1" name="">
+          <a:extLst>
+            <a:ext uri="{FF2B5EF4-FFF2-40B4-BE49-F238E27FC236}">
+              <a16:creationId xmlns:a16="http://schemas.microsoft.com/office/drawing/2014/main" id="{3C03A869-601C-5F7D-2432-097104E9B456}"/>
+            </a:ext>
+          </a:extLst>
+        </p:cNvPr>
+        <p:cNvGrpSpPr/>
+        <p:nvPr/>
+      </p:nvGrpSpPr>
+      <p:grpSpPr>
+        <a:xfrm>
+          <a:off x="0" y="0"/>
+          <a:ext cx="0" cy="0"/>
+          <a:chOff x="0" y="0"/>
+          <a:chExt cx="0" cy="0"/>
+        </a:xfrm>
+      </p:grpSpPr>
+      <p:sp>
+        <p:nvSpPr>
+          <p:cNvPr id="2" name="标题 1">
+            <a:extLst>
+              <a:ext uri="{FF2B5EF4-FFF2-40B4-BE49-F238E27FC236}">
+                <a16:creationId xmlns:a16="http://schemas.microsoft.com/office/drawing/2014/main" id="{9C67CA55-DC26-2F06-8417-8571A7B20FEF}"/>
+              </a:ext>
+            </a:extLst>
+          </p:cNvPr>
+          <p:cNvSpPr>
+            <a:spLocks noGrp="1"/>
+          </p:cNvSpPr>
+          <p:nvPr>
+            <p:ph type="title"/>
+          </p:nvPr>
+        </p:nvSpPr>
+        <p:spPr>
+          <a:xfrm>
+            <a:off x="838200" y="365126"/>
+            <a:ext cx="10515600" cy="865534"/>
+          </a:xfrm>
+        </p:spPr>
+        <p:txBody>
+          <a:bodyPr>
+            <a:normAutofit/>
+          </a:bodyPr>
+          <a:lstStyle/>
+          <a:p>
+            <a:r>
+              <a:rPr lang="zh-CN" altLang="zh-CN" sz="3200" dirty="0"/>
+              <a:t>退化问题</a:t>
+            </a:r>
+            <a:endParaRPr lang="zh-CN" altLang="en-US" sz="2000" dirty="0"/>
+          </a:p>
+        </p:txBody>
+      </p:sp>
+      <p:pic>
+        <p:nvPicPr>
+          <p:cNvPr id="5" name="内容占位符 4">
+            <a:extLst>
+              <a:ext uri="{FF2B5EF4-FFF2-40B4-BE49-F238E27FC236}">
+                <a16:creationId xmlns:a16="http://schemas.microsoft.com/office/drawing/2014/main" id="{289B696E-5C26-EDDB-5D1B-18535D44BEAE}"/>
+              </a:ext>
+            </a:extLst>
+          </p:cNvPr>
+          <p:cNvPicPr>
+            <a:picLocks noGrp="1" noChangeAspect="1"/>
+          </p:cNvPicPr>
+          <p:nvPr>
+            <p:ph idx="1"/>
+          </p:nvPr>
+        </p:nvPicPr>
+        <p:blipFill>
+          <a:blip r:embed="rId2">
+            <a:extLst>
+              <a:ext uri="{28A0092B-C50C-407E-A947-70E740481C1C}">
+                <a14:useLocalDpi xmlns:a14="http://schemas.microsoft.com/office/drawing/2010/main" val="0"/>
+              </a:ext>
+            </a:extLst>
+          </a:blip>
+          <a:stretch>
+            <a:fillRect/>
+          </a:stretch>
+        </p:blipFill>
+        <p:spPr>
+          <a:xfrm>
+            <a:off x="10488266" y="310124"/>
+            <a:ext cx="865534" cy="865534"/>
+          </a:xfrm>
+        </p:spPr>
+      </p:pic>
+      <p:cxnSp>
+        <p:nvCxnSpPr>
+          <p:cNvPr id="7" name="直接连接符 6">
+            <a:extLst>
+              <a:ext uri="{FF2B5EF4-FFF2-40B4-BE49-F238E27FC236}">
+                <a16:creationId xmlns:a16="http://schemas.microsoft.com/office/drawing/2014/main" id="{46527346-5320-73DF-2659-2532E6E15A4F}"/>
+              </a:ext>
+            </a:extLst>
+          </p:cNvPr>
+          <p:cNvCxnSpPr/>
+          <p:nvPr/>
+        </p:nvCxnSpPr>
+        <p:spPr>
+          <a:xfrm>
+            <a:off x="893774" y="1236928"/>
+            <a:ext cx="10548000" cy="0"/>
+          </a:xfrm>
+          <a:prstGeom prst="line">
+            <a:avLst/>
+          </a:prstGeom>
+        </p:spPr>
+        <p:style>
+          <a:lnRef idx="1">
+            <a:schemeClr val="accent1"/>
+          </a:lnRef>
+          <a:fillRef idx="0">
+            <a:schemeClr val="accent1"/>
+          </a:fillRef>
+          <a:effectRef idx="0">
+            <a:schemeClr val="accent1"/>
+          </a:effectRef>
+          <a:fontRef idx="minor">
+            <a:schemeClr val="tx1"/>
+          </a:fontRef>
+        </p:style>
+      </p:cxnSp>
+      <p:pic>
+        <p:nvPicPr>
+          <p:cNvPr id="8" name="图片 7" descr="文本&#10;&#10;AI 生成的内容可能不正确。">
+            <a:extLst>
+              <a:ext uri="{FF2B5EF4-FFF2-40B4-BE49-F238E27FC236}">
+                <a16:creationId xmlns:a16="http://schemas.microsoft.com/office/drawing/2014/main" id="{A6BF66A2-8832-4BD3-DE28-FB4CB70D8067}"/>
+              </a:ext>
+            </a:extLst>
+          </p:cNvPr>
+          <p:cNvPicPr>
+            <a:picLocks noChangeAspect="1"/>
+          </p:cNvPicPr>
+          <p:nvPr/>
+        </p:nvPicPr>
+        <p:blipFill>
+          <a:blip r:embed="rId3"/>
+          <a:stretch>
+            <a:fillRect/>
+          </a:stretch>
+        </p:blipFill>
+        <p:spPr>
+          <a:xfrm>
+            <a:off x="838200" y="1814775"/>
+            <a:ext cx="10226767" cy="3228450"/>
+          </a:xfrm>
+          <a:prstGeom prst="rect">
+            <a:avLst/>
+          </a:prstGeom>
+        </p:spPr>
+      </p:pic>
+    </p:spTree>
+    <p:extLst>
+      <p:ext uri="{BB962C8B-B14F-4D97-AF65-F5344CB8AC3E}">
+        <p14:creationId xmlns:p14="http://schemas.microsoft.com/office/powerpoint/2010/main" val="249415163"/>
+      </p:ext>
+    </p:extLst>
+  </p:cSld>
+  <p:clrMapOvr>
+    <a:masterClrMapping/>
+  </p:clrMapOvr>
+</p:sld>
+</file>
+
+<file path=ppt/slides/slide7.xml><?xml version="1.0" encoding="utf-8"?>
+<p:sld xmlns:a="http://schemas.openxmlformats.org/drawingml/2006/main" xmlns:r="http://schemas.openxmlformats.org/officeDocument/2006/relationships" xmlns:p="http://schemas.openxmlformats.org/presentationml/2006/main">
+  <p:cSld>
+    <p:spTree>
+      <p:nvGrpSpPr>
+        <p:cNvPr id="1" name="">
+          <a:extLst>
+            <a:ext uri="{FF2B5EF4-FFF2-40B4-BE49-F238E27FC236}">
+              <a16:creationId xmlns:a16="http://schemas.microsoft.com/office/drawing/2014/main" id="{B9B9720C-84F1-7A46-0E07-D6C1CFA231A3}"/>
+            </a:ext>
+          </a:extLst>
+        </p:cNvPr>
+        <p:cNvGrpSpPr/>
+        <p:nvPr/>
+      </p:nvGrpSpPr>
+      <p:grpSpPr>
+        <a:xfrm>
+          <a:off x="0" y="0"/>
+          <a:ext cx="0" cy="0"/>
+          <a:chOff x="0" y="0"/>
+          <a:chExt cx="0" cy="0"/>
+        </a:xfrm>
+      </p:grpSpPr>
+      <p:sp>
+        <p:nvSpPr>
+          <p:cNvPr id="2" name="标题 1">
+            <a:extLst>
+              <a:ext uri="{FF2B5EF4-FFF2-40B4-BE49-F238E27FC236}">
+                <a16:creationId xmlns:a16="http://schemas.microsoft.com/office/drawing/2014/main" id="{139C98D6-3626-5B09-0E2E-ADE3ADE7AC7A}"/>
+              </a:ext>
+            </a:extLst>
+          </p:cNvPr>
+          <p:cNvSpPr>
+            <a:spLocks noGrp="1"/>
+          </p:cNvSpPr>
+          <p:nvPr>
+            <p:ph type="title"/>
+          </p:nvPr>
+        </p:nvSpPr>
+        <p:spPr>
+          <a:xfrm>
+            <a:off x="838200" y="365126"/>
+            <a:ext cx="10515600" cy="865534"/>
+          </a:xfrm>
+        </p:spPr>
+        <p:txBody>
+          <a:bodyPr>
+            <a:normAutofit/>
+          </a:bodyPr>
+          <a:lstStyle/>
+          <a:p>
+            <a:r>
+              <a:rPr lang="zh-CN" altLang="zh-CN" sz="3200" dirty="0"/>
+              <a:t>残差表示</a:t>
+            </a:r>
+            <a:endParaRPr lang="zh-CN" altLang="en-US" sz="2000" dirty="0"/>
+          </a:p>
+        </p:txBody>
+      </p:sp>
+      <p:pic>
+        <p:nvPicPr>
+          <p:cNvPr id="5" name="内容占位符 4">
+            <a:extLst>
+              <a:ext uri="{FF2B5EF4-FFF2-40B4-BE49-F238E27FC236}">
+                <a16:creationId xmlns:a16="http://schemas.microsoft.com/office/drawing/2014/main" id="{86838590-AA6D-534D-B0B2-C0D7A6CED647}"/>
+              </a:ext>
+            </a:extLst>
+          </p:cNvPr>
+          <p:cNvPicPr>
+            <a:picLocks noGrp="1" noChangeAspect="1"/>
+          </p:cNvPicPr>
+          <p:nvPr>
+            <p:ph idx="1"/>
+          </p:nvPr>
+        </p:nvPicPr>
+        <p:blipFill>
+          <a:blip r:embed="rId2">
+            <a:extLst>
+              <a:ext uri="{28A0092B-C50C-407E-A947-70E740481C1C}">
+                <a14:useLocalDpi xmlns:a14="http://schemas.microsoft.com/office/drawing/2010/main" val="0"/>
+              </a:ext>
+            </a:extLst>
+          </a:blip>
+          <a:stretch>
+            <a:fillRect/>
+          </a:stretch>
+        </p:blipFill>
+        <p:spPr>
+          <a:xfrm>
+            <a:off x="10488266" y="310124"/>
+            <a:ext cx="865534" cy="865534"/>
+          </a:xfrm>
+        </p:spPr>
+      </p:pic>
+      <p:cxnSp>
+        <p:nvCxnSpPr>
+          <p:cNvPr id="7" name="直接连接符 6">
+            <a:extLst>
+              <a:ext uri="{FF2B5EF4-FFF2-40B4-BE49-F238E27FC236}">
+                <a16:creationId xmlns:a16="http://schemas.microsoft.com/office/drawing/2014/main" id="{2F6BEF4F-7835-2EA0-86B0-B81AEB270B9F}"/>
+              </a:ext>
+            </a:extLst>
+          </p:cNvPr>
+          <p:cNvCxnSpPr/>
+          <p:nvPr/>
+        </p:nvCxnSpPr>
+        <p:spPr>
+          <a:xfrm>
+            <a:off x="893774" y="1236928"/>
+            <a:ext cx="10548000" cy="0"/>
+          </a:xfrm>
+          <a:prstGeom prst="line">
+            <a:avLst/>
+          </a:prstGeom>
+        </p:spPr>
+        <p:style>
+          <a:lnRef idx="1">
+            <a:schemeClr val="accent1"/>
+          </a:lnRef>
+          <a:fillRef idx="0">
+            <a:schemeClr val="accent1"/>
+          </a:fillRef>
+          <a:effectRef idx="0">
+            <a:schemeClr val="accent1"/>
+          </a:effectRef>
+          <a:fontRef idx="minor">
+            <a:schemeClr val="tx1"/>
+          </a:fontRef>
+        </p:style>
+      </p:cxnSp>
+      <p:pic>
+        <p:nvPicPr>
+          <p:cNvPr id="4" name="图片 3" descr="文本&#10;&#10;AI 生成的内容可能不正确。">
+            <a:extLst>
+              <a:ext uri="{FF2B5EF4-FFF2-40B4-BE49-F238E27FC236}">
+                <a16:creationId xmlns:a16="http://schemas.microsoft.com/office/drawing/2014/main" id="{55AE5C85-31B8-717E-1CAC-98FCA456D8F5}"/>
+              </a:ext>
+            </a:extLst>
+          </p:cNvPr>
+          <p:cNvPicPr>
+            <a:picLocks noChangeAspect="1"/>
+          </p:cNvPicPr>
+          <p:nvPr/>
+        </p:nvPicPr>
+        <p:blipFill>
+          <a:blip r:embed="rId3"/>
+          <a:stretch>
+            <a:fillRect/>
+          </a:stretch>
+        </p:blipFill>
+        <p:spPr>
+          <a:xfrm>
+            <a:off x="838200" y="2095848"/>
+            <a:ext cx="10288434" cy="3471436"/>
+          </a:xfrm>
+          <a:prstGeom prst="rect">
+            <a:avLst/>
+          </a:prstGeom>
+        </p:spPr>
+      </p:pic>
+    </p:spTree>
+    <p:extLst>
+      <p:ext uri="{BB962C8B-B14F-4D97-AF65-F5344CB8AC3E}">
+        <p14:creationId xmlns:p14="http://schemas.microsoft.com/office/powerpoint/2010/main" val="2179919058"/>
+      </p:ext>
+    </p:extLst>
+  </p:cSld>
+  <p:clrMapOvr>
+    <a:masterClrMapping/>
+  </p:clrMapOvr>
+</p:sld>
+</file>
+
+<file path=ppt/slides/slide8.xml><?xml version="1.0" encoding="utf-8"?>
+<p:sld xmlns:a="http://schemas.openxmlformats.org/drawingml/2006/main" xmlns:r="http://schemas.openxmlformats.org/officeDocument/2006/relationships" xmlns:p="http://schemas.openxmlformats.org/presentationml/2006/main">
+  <p:cSld>
+    <p:spTree>
+      <p:nvGrpSpPr>
+        <p:cNvPr id="1" name="">
+          <a:extLst>
+            <a:ext uri="{FF2B5EF4-FFF2-40B4-BE49-F238E27FC236}">
+              <a16:creationId xmlns:a16="http://schemas.microsoft.com/office/drawing/2014/main" id="{8549377F-F1BF-1F5B-3FA7-C4ADC6AF8AC3}"/>
+            </a:ext>
+          </a:extLst>
+        </p:cNvPr>
+        <p:cNvGrpSpPr/>
+        <p:nvPr/>
+      </p:nvGrpSpPr>
+      <p:grpSpPr>
+        <a:xfrm>
+          <a:off x="0" y="0"/>
+          <a:ext cx="0" cy="0"/>
+          <a:chOff x="0" y="0"/>
+          <a:chExt cx="0" cy="0"/>
+        </a:xfrm>
+      </p:grpSpPr>
+      <p:sp>
+        <p:nvSpPr>
+          <p:cNvPr id="2" name="标题 1">
+            <a:extLst>
+              <a:ext uri="{FF2B5EF4-FFF2-40B4-BE49-F238E27FC236}">
+                <a16:creationId xmlns:a16="http://schemas.microsoft.com/office/drawing/2014/main" id="{A20FACC4-74B0-B49F-BA41-EC620A860D34}"/>
+              </a:ext>
+            </a:extLst>
+          </p:cNvPr>
+          <p:cNvSpPr>
+            <a:spLocks noGrp="1"/>
+          </p:cNvSpPr>
+          <p:nvPr>
+            <p:ph type="title"/>
+          </p:nvPr>
+        </p:nvSpPr>
+        <p:spPr>
+          <a:xfrm>
+            <a:off x="838200" y="3263601"/>
+            <a:ext cx="10515600" cy="865534"/>
+          </a:xfrm>
+        </p:spPr>
+        <p:txBody>
+          <a:bodyPr>
+            <a:normAutofit/>
+          </a:bodyPr>
+          <a:lstStyle/>
+          <a:p>
+            <a:pPr algn="ctr"/>
+            <a:r>
+              <a:rPr lang="zh-CN" altLang="en-US" sz="3200" dirty="0"/>
+              <a:t>相关工作</a:t>
+            </a:r>
+          </a:p>
+        </p:txBody>
+      </p:sp>
+      <p:pic>
+        <p:nvPicPr>
+          <p:cNvPr id="5" name="内容占位符 4">
+            <a:extLst>
+              <a:ext uri="{FF2B5EF4-FFF2-40B4-BE49-F238E27FC236}">
+                <a16:creationId xmlns:a16="http://schemas.microsoft.com/office/drawing/2014/main" id="{0425CD08-0499-6088-1151-857731C1113A}"/>
+              </a:ext>
+            </a:extLst>
+          </p:cNvPr>
+          <p:cNvPicPr>
+            <a:picLocks noGrp="1" noChangeAspect="1"/>
+          </p:cNvPicPr>
+          <p:nvPr>
+            <p:ph idx="1"/>
+          </p:nvPr>
+        </p:nvPicPr>
+        <p:blipFill>
+          <a:blip r:embed="rId2">
+            <a:extLst>
+              <a:ext uri="{28A0092B-C50C-407E-A947-70E740481C1C}">
+                <a14:useLocalDpi xmlns:a14="http://schemas.microsoft.com/office/drawing/2010/main" val="0"/>
+              </a:ext>
+            </a:extLst>
+          </a:blip>
+          <a:stretch>
+            <a:fillRect/>
+          </a:stretch>
+        </p:blipFill>
+        <p:spPr>
+          <a:xfrm>
+            <a:off x="10488266" y="310124"/>
+            <a:ext cx="865534" cy="865534"/>
+          </a:xfrm>
+        </p:spPr>
+      </p:pic>
+      <p:cxnSp>
+        <p:nvCxnSpPr>
+          <p:cNvPr id="7" name="直接连接符 6">
+            <a:extLst>
+              <a:ext uri="{FF2B5EF4-FFF2-40B4-BE49-F238E27FC236}">
+                <a16:creationId xmlns:a16="http://schemas.microsoft.com/office/drawing/2014/main" id="{7E45407A-89C2-580D-B7EB-1A31BA1CD7AD}"/>
+              </a:ext>
+            </a:extLst>
+          </p:cNvPr>
+          <p:cNvCxnSpPr/>
+          <p:nvPr/>
+        </p:nvCxnSpPr>
+        <p:spPr>
+          <a:xfrm>
+            <a:off x="893774" y="1236928"/>
+            <a:ext cx="10548000" cy="0"/>
+          </a:xfrm>
+          <a:prstGeom prst="line">
+            <a:avLst/>
+          </a:prstGeom>
+        </p:spPr>
+        <p:style>
+          <a:lnRef idx="1">
+            <a:schemeClr val="accent1"/>
+          </a:lnRef>
+          <a:fillRef idx="0">
+            <a:schemeClr val="accent1"/>
+          </a:fillRef>
+          <a:effectRef idx="0">
+            <a:schemeClr val="accent1"/>
+          </a:effectRef>
+          <a:fontRef idx="minor">
+            <a:schemeClr val="tx1"/>
+          </a:fontRef>
+        </p:style>
+      </p:cxnSp>
+    </p:spTree>
+    <p:extLst>
+      <p:ext uri="{BB962C8B-B14F-4D97-AF65-F5344CB8AC3E}">
+        <p14:creationId xmlns:p14="http://schemas.microsoft.com/office/powerpoint/2010/main" val="4192645066"/>
+      </p:ext>
+    </p:extLst>
+  </p:cSld>
+  <p:clrMapOvr>
+    <a:masterClrMapping/>
+  </p:clrMapOvr>
+</p:sld>
+</file>
+
+<file path=ppt/slides/slide9.xml><?xml version="1.0" encoding="utf-8"?>
+<p:sld xmlns:a="http://schemas.openxmlformats.org/drawingml/2006/main" xmlns:r="http://schemas.openxmlformats.org/officeDocument/2006/relationships" xmlns:p="http://schemas.openxmlformats.org/presentationml/2006/main">
+  <p:cSld>
+    <p:spTree>
+      <p:nvGrpSpPr>
+        <p:cNvPr id="1" name="">
+          <a:extLst>
+            <a:ext uri="{FF2B5EF4-FFF2-40B4-BE49-F238E27FC236}">
+              <a16:creationId xmlns:a16="http://schemas.microsoft.com/office/drawing/2014/main" id="{A1888B8D-90A6-F42A-E0BC-47E4A2D015A7}"/>
+            </a:ext>
+          </a:extLst>
+        </p:cNvPr>
+        <p:cNvGrpSpPr/>
+        <p:nvPr/>
+      </p:nvGrpSpPr>
+      <p:grpSpPr>
+        <a:xfrm>
+          <a:off x="0" y="0"/>
+          <a:ext cx="0" cy="0"/>
+          <a:chOff x="0" y="0"/>
+          <a:chExt cx="0" cy="0"/>
+        </a:xfrm>
+      </p:grpSpPr>
+      <p:sp>
+        <p:nvSpPr>
+          <p:cNvPr id="2" name="标题 1">
+            <a:extLst>
+              <a:ext uri="{FF2B5EF4-FFF2-40B4-BE49-F238E27FC236}">
+                <a16:creationId xmlns:a16="http://schemas.microsoft.com/office/drawing/2014/main" id="{0B5BF479-EF72-49CB-2EA5-B8512B964E73}"/>
+              </a:ext>
+            </a:extLst>
+          </p:cNvPr>
+          <p:cNvSpPr>
+            <a:spLocks noGrp="1"/>
+          </p:cNvSpPr>
+          <p:nvPr>
+            <p:ph type="title"/>
+          </p:nvPr>
+        </p:nvSpPr>
+        <p:spPr>
+          <a:xfrm>
+            <a:off x="838200" y="365126"/>
+            <a:ext cx="10515600" cy="865534"/>
+          </a:xfrm>
+        </p:spPr>
+        <p:txBody>
+          <a:bodyPr>
+            <a:normAutofit/>
+          </a:bodyPr>
+          <a:lstStyle/>
+          <a:p>
+            <a:r>
+              <a:rPr lang="en-US" altLang="zh-CN" sz="3200" dirty="0"/>
+              <a:t>VGG (Visual Geometry Group)</a:t>
+            </a:r>
+            <a:endParaRPr lang="zh-CN" altLang="en-US" sz="3200" dirty="0"/>
+          </a:p>
+        </p:txBody>
+      </p:sp>
+      <p:pic>
+        <p:nvPicPr>
+          <p:cNvPr id="5" name="内容占位符 4">
+            <a:extLst>
+              <a:ext uri="{FF2B5EF4-FFF2-40B4-BE49-F238E27FC236}">
+                <a16:creationId xmlns:a16="http://schemas.microsoft.com/office/drawing/2014/main" id="{095B1924-06A1-F29B-0BD6-0A6917854B2D}"/>
+              </a:ext>
+            </a:extLst>
+          </p:cNvPr>
+          <p:cNvPicPr>
+            <a:picLocks noGrp="1" noChangeAspect="1"/>
+          </p:cNvPicPr>
+          <p:nvPr>
+            <p:ph idx="1"/>
+          </p:nvPr>
+        </p:nvPicPr>
+        <p:blipFill>
+          <a:blip r:embed="rId2">
+            <a:extLst>
+              <a:ext uri="{28A0092B-C50C-407E-A947-70E740481C1C}">
+                <a14:useLocalDpi xmlns:a14="http://schemas.microsoft.com/office/drawing/2010/main" val="0"/>
+              </a:ext>
+            </a:extLst>
+          </a:blip>
+          <a:stretch>
+            <a:fillRect/>
+          </a:stretch>
+        </p:blipFill>
+        <p:spPr>
+          <a:xfrm>
+            <a:off x="10488266" y="310124"/>
+            <a:ext cx="865534" cy="865534"/>
+          </a:xfrm>
+        </p:spPr>
+      </p:pic>
+      <p:cxnSp>
+        <p:nvCxnSpPr>
+          <p:cNvPr id="7" name="直接连接符 6">
+            <a:extLst>
+              <a:ext uri="{FF2B5EF4-FFF2-40B4-BE49-F238E27FC236}">
+                <a16:creationId xmlns:a16="http://schemas.microsoft.com/office/drawing/2014/main" id="{6D9C5E74-E044-6903-598E-8B4D2A157542}"/>
+              </a:ext>
+            </a:extLst>
+          </p:cNvPr>
+          <p:cNvCxnSpPr/>
+          <p:nvPr/>
+        </p:nvCxnSpPr>
+        <p:spPr>
+          <a:xfrm>
+            <a:off x="893774" y="1236928"/>
+            <a:ext cx="10548000" cy="0"/>
+          </a:xfrm>
+          <a:prstGeom prst="line">
+            <a:avLst/>
+          </a:prstGeom>
+        </p:spPr>
+        <p:style>
+          <a:lnRef idx="1">
+            <a:schemeClr val="accent1"/>
+          </a:lnRef>
+          <a:fillRef idx="0">
+            <a:schemeClr val="accent1"/>
+          </a:fillRef>
+          <a:effectRef idx="0">
+            <a:schemeClr val="accent1"/>
+          </a:effectRef>
+          <a:fontRef idx="minor">
+            <a:schemeClr val="tx1"/>
+          </a:fontRef>
+        </p:style>
+      </p:cxnSp>
+      <p:pic>
+        <p:nvPicPr>
+          <p:cNvPr id="6" name="图片 5">
+            <a:extLst>
+              <a:ext uri="{FF2B5EF4-FFF2-40B4-BE49-F238E27FC236}">
+                <a16:creationId xmlns:a16="http://schemas.microsoft.com/office/drawing/2014/main" id="{212EB3B7-1FA4-8577-B1FD-35EB09364854}"/>
+              </a:ext>
+            </a:extLst>
+          </p:cNvPr>
+          <p:cNvPicPr>
+            <a:picLocks noChangeAspect="1"/>
+          </p:cNvPicPr>
+          <p:nvPr/>
+        </p:nvPicPr>
+        <p:blipFill>
+          <a:blip r:embed="rId3">
+            <a:extLst>
+              <a:ext uri="{28A0092B-C50C-407E-A947-70E740481C1C}">
+                <a14:useLocalDpi xmlns:a14="http://schemas.microsoft.com/office/drawing/2010/main" val="0"/>
+              </a:ext>
+            </a:extLst>
+          </a:blip>
+          <a:stretch>
+            <a:fillRect/>
+          </a:stretch>
+        </p:blipFill>
+        <p:spPr>
+          <a:xfrm>
+            <a:off x="2560062" y="1413306"/>
+            <a:ext cx="7071875" cy="4207766"/>
+          </a:xfrm>
+          <a:prstGeom prst="rect">
+            <a:avLst/>
+          </a:prstGeom>
+        </p:spPr>
+      </p:pic>
+      <p:sp>
+        <p:nvSpPr>
+          <p:cNvPr id="10" name="文本框 9">
+            <a:extLst>
+              <a:ext uri="{FF2B5EF4-FFF2-40B4-BE49-F238E27FC236}">
+                <a16:creationId xmlns:a16="http://schemas.microsoft.com/office/drawing/2014/main" id="{9FECC5A7-99CC-4E3B-E12A-99C4EEF6D68C}"/>
+              </a:ext>
+            </a:extLst>
+          </p:cNvPr>
+          <p:cNvSpPr txBox="1"/>
+          <p:nvPr/>
+        </p:nvSpPr>
+        <p:spPr>
+          <a:xfrm>
+            <a:off x="1707916" y="5667079"/>
+            <a:ext cx="8919713" cy="369332"/>
+          </a:xfrm>
+          <a:prstGeom prst="rect">
+            <a:avLst/>
+          </a:prstGeom>
+          <a:noFill/>
+        </p:spPr>
+        <p:txBody>
+          <a:bodyPr wrap="square" rtlCol="0">
+            <a:spAutoFit/>
+          </a:bodyPr>
+          <a:lstStyle/>
+          <a:p>
+            <a:pPr algn="ctr"/>
+            <a:r>
+              <a:rPr lang="en-US" altLang="zh-CN" dirty="0"/>
+              <a:t>Very Deep Convolutional Networks for Large-Scale Image Recognition ICLR 2015</a:t>
+            </a:r>
+            <a:endParaRPr lang="zh-CN" altLang="en-US" dirty="0"/>
+          </a:p>
+        </p:txBody>
+      </p:sp>
+    </p:spTree>
+    <p:extLst>
+      <p:ext uri="{BB962C8B-B14F-4D97-AF65-F5344CB8AC3E}">
+        <p14:creationId xmlns:p14="http://schemas.microsoft.com/office/powerpoint/2010/main" val="3353510254"/>
       </p:ext>
     </p:extLst>
   </p:cSld>

--- a/文献阅读/张宗桪-.pptx
+++ b/文献阅读/张宗桪-.pptx
@@ -11,17 +11,20 @@
     <p:sldId id="262" r:id="rId5"/>
     <p:sldId id="263" r:id="rId6"/>
     <p:sldId id="264" r:id="rId7"/>
-    <p:sldId id="265" r:id="rId8"/>
-    <p:sldId id="268" r:id="rId9"/>
-    <p:sldId id="266" r:id="rId10"/>
-    <p:sldId id="267" r:id="rId11"/>
-    <p:sldId id="269" r:id="rId12"/>
+    <p:sldId id="268" r:id="rId8"/>
+    <p:sldId id="266" r:id="rId9"/>
+    <p:sldId id="267" r:id="rId10"/>
+    <p:sldId id="269" r:id="rId11"/>
+    <p:sldId id="265" r:id="rId12"/>
     <p:sldId id="270" r:id="rId13"/>
     <p:sldId id="271" r:id="rId14"/>
     <p:sldId id="272" r:id="rId15"/>
     <p:sldId id="273" r:id="rId16"/>
     <p:sldId id="274" r:id="rId17"/>
     <p:sldId id="275" r:id="rId18"/>
+    <p:sldId id="276" r:id="rId19"/>
+    <p:sldId id="280" r:id="rId20"/>
+    <p:sldId id="277" r:id="rId21"/>
   </p:sldIdLst>
   <p:sldSz cx="12192000" cy="6858000"/>
   <p:notesSz cx="6858000" cy="9144000"/>
@@ -1177,42 +1180,6 @@
         </a:p>
       </dgm:t>
     </dgm:pt>
-    <dgm:pt modelId="{E3731114-64D9-4F6A-8A95-389F5445CACE}">
-      <dgm:prSet phldrT="[文本]" custT="1"/>
-      <dgm:spPr/>
-      <dgm:t>
-        <a:bodyPr/>
-        <a:lstStyle/>
-        <a:p>
-          <a:r>
-            <a:rPr lang="zh-CN" altLang="en-US" sz="2000" dirty="0"/>
-            <a:t>算法</a:t>
-          </a:r>
-        </a:p>
-      </dgm:t>
-    </dgm:pt>
-    <dgm:pt modelId="{36140716-D216-46BD-9A3F-4573961A08DA}" type="parTrans" cxnId="{85AD9D6C-E1F7-4A2F-98F9-567F9F3C3F6A}">
-      <dgm:prSet/>
-      <dgm:spPr/>
-      <dgm:t>
-        <a:bodyPr/>
-        <a:lstStyle/>
-        <a:p>
-          <a:endParaRPr lang="zh-CN" altLang="en-US"/>
-        </a:p>
-      </dgm:t>
-    </dgm:pt>
-    <dgm:pt modelId="{F81E8FC2-FE36-4FFB-A806-2E8C6E284C7A}" type="sibTrans" cxnId="{85AD9D6C-E1F7-4A2F-98F9-567F9F3C3F6A}">
-      <dgm:prSet/>
-      <dgm:spPr/>
-      <dgm:t>
-        <a:bodyPr/>
-        <a:lstStyle/>
-        <a:p>
-          <a:endParaRPr lang="zh-CN" altLang="en-US"/>
-        </a:p>
-      </dgm:t>
-    </dgm:pt>
     <dgm:pt modelId="{47FCFBF9-6E75-4F5C-B7F7-F452E464FB24}" type="pres">
       <dgm:prSet presAssocID="{239E81E4-3641-4F3A-A7FF-071C8AD2EF04}" presName="Name0" presStyleCnt="0">
         <dgm:presLayoutVars>
@@ -1304,12 +1271,10 @@
     <dgm:cxn modelId="{CAD46063-114E-422D-8BD0-E380A789CC21}" type="presOf" srcId="{372EE177-9220-4540-AA03-54030447A842}" destId="{160DE56B-C1D9-42E4-A942-F7DDC8F7C922}" srcOrd="0" destOrd="1" presId="urn:microsoft.com/office/officeart/2005/8/layout/hList1"/>
     <dgm:cxn modelId="{9764CC44-85EA-48C7-8B09-3A82DC1AEEA0}" type="presOf" srcId="{588FAB3E-8E08-430E-A7D8-AB20D23081EF}" destId="{9B74609E-B1F4-46CE-9523-EA37010C8E5F}" srcOrd="0" destOrd="0" presId="urn:microsoft.com/office/officeart/2005/8/layout/hList1"/>
     <dgm:cxn modelId="{F0B6E447-D163-4ACD-9943-4818E8D668C0}" type="presOf" srcId="{239E81E4-3641-4F3A-A7FF-071C8AD2EF04}" destId="{47FCFBF9-6E75-4F5C-B7F7-F452E464FB24}" srcOrd="0" destOrd="0" presId="urn:microsoft.com/office/officeart/2005/8/layout/hList1"/>
-    <dgm:cxn modelId="{85AD9D6C-E1F7-4A2F-98F9-567F9F3C3F6A}" srcId="{E029E8E3-BA94-4E38-B486-F0BE93D0CB8F}" destId="{E3731114-64D9-4F6A-8A95-389F5445CACE}" srcOrd="1" destOrd="0" parTransId="{36140716-D216-46BD-9A3F-4573961A08DA}" sibTransId="{F81E8FC2-FE36-4FFB-A806-2E8C6E284C7A}"/>
     <dgm:cxn modelId="{E509526F-317B-4457-9853-75FD2511D6A7}" srcId="{59F46E65-11DE-47CE-9445-64200CF431A8}" destId="{372EE177-9220-4540-AA03-54030447A842}" srcOrd="1" destOrd="0" parTransId="{BF016E00-4292-4B47-B048-3FCCDAA2D9CA}" sibTransId="{D37C1B84-5794-4071-B464-65C6DC93AE5C}"/>
     <dgm:cxn modelId="{8D1FC677-C5D8-4F64-8C9E-C2CC7252B704}" type="presOf" srcId="{05BE3A41-958E-4FE3-9CDB-04212D4ACD67}" destId="{35C6C27F-C411-41AF-89D3-8DB1AB547C75}" srcOrd="0" destOrd="0" presId="urn:microsoft.com/office/officeart/2005/8/layout/hList1"/>
     <dgm:cxn modelId="{42550E58-6C0B-48AD-AF54-8B1345B0FAE9}" srcId="{239E81E4-3641-4F3A-A7FF-071C8AD2EF04}" destId="{59F46E65-11DE-47CE-9445-64200CF431A8}" srcOrd="0" destOrd="0" parTransId="{6924FC05-5095-4061-88BF-D773597A898D}" sibTransId="{0F607E61-83CA-4734-BA53-40836AD71787}"/>
     <dgm:cxn modelId="{673E9F79-7DDD-4B00-BBEF-320EFC1FDF19}" type="presOf" srcId="{4F3F3D2A-F138-4985-AD1D-93D20DEAEF26}" destId="{9B74609E-B1F4-46CE-9523-EA37010C8E5F}" srcOrd="0" destOrd="1" presId="urn:microsoft.com/office/officeart/2005/8/layout/hList1"/>
-    <dgm:cxn modelId="{1C7C3B93-AB66-4070-8409-85CF4FC42464}" type="presOf" srcId="{E3731114-64D9-4F6A-8A95-389F5445CACE}" destId="{57BD0FE5-FA42-4B26-B7DD-F817CB935346}" srcOrd="0" destOrd="1" presId="urn:microsoft.com/office/officeart/2005/8/layout/hList1"/>
     <dgm:cxn modelId="{4E772B99-2B6B-4CEA-BE6F-D2BC97358644}" srcId="{59F46E65-11DE-47CE-9445-64200CF431A8}" destId="{25D14F8C-5803-44A7-A2D2-0439D2593EC6}" srcOrd="0" destOrd="0" parTransId="{DF5906ED-B823-4F74-9D86-BE0E5E402785}" sibTransId="{73B3280E-D8FD-4FEF-A35D-13B4293FBF27}"/>
     <dgm:cxn modelId="{C84ABFB1-3A74-4CF9-A659-EC4BC185DDF4}" type="presOf" srcId="{25D14F8C-5803-44A7-A2D2-0439D2593EC6}" destId="{160DE56B-C1D9-42E4-A942-F7DDC8F7C922}" srcOrd="0" destOrd="0" presId="urn:microsoft.com/office/officeart/2005/8/layout/hList1"/>
     <dgm:cxn modelId="{4A439BB8-2425-4E6A-9082-5E382A553586}" type="presOf" srcId="{59F46E65-11DE-47CE-9445-64200CF431A8}" destId="{A0D0FF07-0FC2-4361-BBCB-886F168523C2}" srcOrd="0" destOrd="0" presId="urn:microsoft.com/office/officeart/2005/8/layout/hList1"/>
@@ -1674,24 +1639,6 @@
           <a:r>
             <a:rPr lang="zh-CN" altLang="en-US" sz="2000" kern="1200" dirty="0"/>
             <a:t>创新点</a:t>
-          </a:r>
-        </a:p>
-        <a:p>
-          <a:pPr marL="228600" lvl="1" indent="-228600" algn="l" defTabSz="889000">
-            <a:lnSpc>
-              <a:spcPct val="90000"/>
-            </a:lnSpc>
-            <a:spcBef>
-              <a:spcPct val="0"/>
-            </a:spcBef>
-            <a:spcAft>
-              <a:spcPct val="15000"/>
-            </a:spcAft>
-            <a:buChar char="•"/>
-          </a:pPr>
-          <a:r>
-            <a:rPr lang="zh-CN" altLang="en-US" sz="2000" kern="1200" dirty="0"/>
-            <a:t>算法</a:t>
           </a:r>
         </a:p>
       </dsp:txBody>
@@ -6482,255 +6429,6 @@
         <p:cNvPr id="1" name="">
           <a:extLst>
             <a:ext uri="{FF2B5EF4-FFF2-40B4-BE49-F238E27FC236}">
-              <a16:creationId xmlns:a16="http://schemas.microsoft.com/office/drawing/2014/main" id="{2E373269-38A4-E115-39E4-BDDB9804532E}"/>
-            </a:ext>
-          </a:extLst>
-        </p:cNvPr>
-        <p:cNvGrpSpPr/>
-        <p:nvPr/>
-      </p:nvGrpSpPr>
-      <p:grpSpPr>
-        <a:xfrm>
-          <a:off x="0" y="0"/>
-          <a:ext cx="0" cy="0"/>
-          <a:chOff x="0" y="0"/>
-          <a:chExt cx="0" cy="0"/>
-        </a:xfrm>
-      </p:grpSpPr>
-      <p:sp>
-        <p:nvSpPr>
-          <p:cNvPr id="2" name="标题 1">
-            <a:extLst>
-              <a:ext uri="{FF2B5EF4-FFF2-40B4-BE49-F238E27FC236}">
-                <a16:creationId xmlns:a16="http://schemas.microsoft.com/office/drawing/2014/main" id="{689A58A5-E60D-69D1-2B23-E2BEE773EEE4}"/>
-              </a:ext>
-            </a:extLst>
-          </p:cNvPr>
-          <p:cNvSpPr>
-            <a:spLocks noGrp="1"/>
-          </p:cNvSpPr>
-          <p:nvPr>
-            <p:ph type="title"/>
-          </p:nvPr>
-        </p:nvSpPr>
-        <p:spPr>
-          <a:xfrm>
-            <a:off x="838200" y="365126"/>
-            <a:ext cx="10515600" cy="865534"/>
-          </a:xfrm>
-        </p:spPr>
-        <p:txBody>
-          <a:bodyPr>
-            <a:normAutofit/>
-          </a:bodyPr>
-          <a:lstStyle/>
-          <a:p>
-            <a:r>
-              <a:rPr lang="zh-CN" altLang="en-US" sz="3200" dirty="0"/>
-              <a:t>捷径连接</a:t>
-            </a:r>
-            <a:endParaRPr lang="zh-CN" altLang="en-US" sz="2000" dirty="0"/>
-          </a:p>
-        </p:txBody>
-      </p:sp>
-      <p:pic>
-        <p:nvPicPr>
-          <p:cNvPr id="5" name="内容占位符 4">
-            <a:extLst>
-              <a:ext uri="{FF2B5EF4-FFF2-40B4-BE49-F238E27FC236}">
-                <a16:creationId xmlns:a16="http://schemas.microsoft.com/office/drawing/2014/main" id="{C4083615-0C5E-4E49-39E7-3FB3B8EB22E0}"/>
-              </a:ext>
-            </a:extLst>
-          </p:cNvPr>
-          <p:cNvPicPr>
-            <a:picLocks noGrp="1" noChangeAspect="1"/>
-          </p:cNvPicPr>
-          <p:nvPr>
-            <p:ph idx="1"/>
-          </p:nvPr>
-        </p:nvPicPr>
-        <p:blipFill>
-          <a:blip r:embed="rId2">
-            <a:extLst>
-              <a:ext uri="{28A0092B-C50C-407E-A947-70E740481C1C}">
-                <a14:useLocalDpi xmlns:a14="http://schemas.microsoft.com/office/drawing/2010/main" val="0"/>
-              </a:ext>
-            </a:extLst>
-          </a:blip>
-          <a:stretch>
-            <a:fillRect/>
-          </a:stretch>
-        </p:blipFill>
-        <p:spPr>
-          <a:xfrm>
-            <a:off x="10488266" y="310124"/>
-            <a:ext cx="865534" cy="865534"/>
-          </a:xfrm>
-        </p:spPr>
-      </p:pic>
-      <p:cxnSp>
-        <p:nvCxnSpPr>
-          <p:cNvPr id="7" name="直接连接符 6">
-            <a:extLst>
-              <a:ext uri="{FF2B5EF4-FFF2-40B4-BE49-F238E27FC236}">
-                <a16:creationId xmlns:a16="http://schemas.microsoft.com/office/drawing/2014/main" id="{E2CD527D-10E2-3C80-1414-464C446ADB6F}"/>
-              </a:ext>
-            </a:extLst>
-          </p:cNvPr>
-          <p:cNvCxnSpPr/>
-          <p:nvPr/>
-        </p:nvCxnSpPr>
-        <p:spPr>
-          <a:xfrm>
-            <a:off x="893774" y="1236928"/>
-            <a:ext cx="10548000" cy="0"/>
-          </a:xfrm>
-          <a:prstGeom prst="line">
-            <a:avLst/>
-          </a:prstGeom>
-        </p:spPr>
-        <p:style>
-          <a:lnRef idx="1">
-            <a:schemeClr val="accent1"/>
-          </a:lnRef>
-          <a:fillRef idx="0">
-            <a:schemeClr val="accent1"/>
-          </a:fillRef>
-          <a:effectRef idx="0">
-            <a:schemeClr val="accent1"/>
-          </a:effectRef>
-          <a:fontRef idx="minor">
-            <a:schemeClr val="tx1"/>
-          </a:fontRef>
-        </p:style>
-      </p:cxnSp>
-      <p:pic>
-        <p:nvPicPr>
-          <p:cNvPr id="4" name="图片 3">
-            <a:extLst>
-              <a:ext uri="{FF2B5EF4-FFF2-40B4-BE49-F238E27FC236}">
-                <a16:creationId xmlns:a16="http://schemas.microsoft.com/office/drawing/2014/main" id="{FF0F94EC-360D-C3F2-2A3C-DB4223A81D34}"/>
-              </a:ext>
-            </a:extLst>
-          </p:cNvPr>
-          <p:cNvPicPr>
-            <a:picLocks noChangeAspect="1"/>
-          </p:cNvPicPr>
-          <p:nvPr/>
-        </p:nvPicPr>
-        <p:blipFill>
-          <a:blip r:embed="rId3">
-            <a:extLst>
-              <a:ext uri="{28A0092B-C50C-407E-A947-70E740481C1C}">
-                <a14:useLocalDpi xmlns:a14="http://schemas.microsoft.com/office/drawing/2010/main" val="0"/>
-              </a:ext>
-            </a:extLst>
-          </a:blip>
-          <a:stretch>
-            <a:fillRect/>
-          </a:stretch>
-        </p:blipFill>
-        <p:spPr>
-          <a:xfrm>
-            <a:off x="1016337" y="1619108"/>
-            <a:ext cx="5418970" cy="4813321"/>
-          </a:xfrm>
-          <a:prstGeom prst="rect">
-            <a:avLst/>
-          </a:prstGeom>
-        </p:spPr>
-      </p:pic>
-      <p:sp>
-        <p:nvSpPr>
-          <p:cNvPr id="8" name="文本框 7">
-            <a:extLst>
-              <a:ext uri="{FF2B5EF4-FFF2-40B4-BE49-F238E27FC236}">
-                <a16:creationId xmlns:a16="http://schemas.microsoft.com/office/drawing/2014/main" id="{99F2A13F-EE8A-1907-D599-41B6C9EC98AF}"/>
-              </a:ext>
-            </a:extLst>
-          </p:cNvPr>
-          <p:cNvSpPr txBox="1"/>
-          <p:nvPr/>
-        </p:nvSpPr>
-        <p:spPr>
-          <a:xfrm>
-            <a:off x="7188679" y="3279410"/>
-            <a:ext cx="6096000" cy="746358"/>
-          </a:xfrm>
-          <a:prstGeom prst="rect">
-            <a:avLst/>
-          </a:prstGeom>
-          <a:noFill/>
-        </p:spPr>
-        <p:txBody>
-          <a:bodyPr wrap="square">
-            <a:spAutoFit/>
-          </a:bodyPr>
-          <a:lstStyle/>
-          <a:p>
-            <a:pPr>
-              <a:lnSpc>
-                <a:spcPts val="2099"/>
-              </a:lnSpc>
-              <a:spcAft>
-                <a:spcPts val="900"/>
-              </a:spcAft>
-            </a:pPr>
-            <a:r>
-              <a:rPr lang="en-US" altLang="zh-CN" b="1" i="0" dirty="0">
-                <a:solidFill>
-                  <a:srgbClr val="000000"/>
-                </a:solidFill>
-                <a:effectLst/>
-                <a:latin typeface="Lucida Grande"/>
-              </a:rPr>
-              <a:t>Training Very Deep Networks </a:t>
-            </a:r>
-          </a:p>
-          <a:p>
-            <a:pPr>
-              <a:lnSpc>
-                <a:spcPts val="2099"/>
-              </a:lnSpc>
-              <a:spcAft>
-                <a:spcPts val="900"/>
-              </a:spcAft>
-            </a:pPr>
-            <a:r>
-              <a:rPr lang="en-US" altLang="zh-CN" dirty="0"/>
-              <a:t>Neural Information Processing Systems 2015</a:t>
-            </a:r>
-            <a:endParaRPr lang="en-US" altLang="zh-CN" b="1" i="0" dirty="0">
-              <a:solidFill>
-                <a:srgbClr val="000000"/>
-              </a:solidFill>
-              <a:effectLst/>
-              <a:latin typeface="Lucida Grande"/>
-            </a:endParaRPr>
-          </a:p>
-        </p:txBody>
-      </p:sp>
-    </p:spTree>
-    <p:extLst>
-      <p:ext uri="{BB962C8B-B14F-4D97-AF65-F5344CB8AC3E}">
-        <p14:creationId xmlns:p14="http://schemas.microsoft.com/office/powerpoint/2010/main" val="3946219806"/>
-      </p:ext>
-    </p:extLst>
-  </p:cSld>
-  <p:clrMapOvr>
-    <a:masterClrMapping/>
-  </p:clrMapOvr>
-</p:sld>
-</file>
-
-<file path=ppt/slides/slide11.xml><?xml version="1.0" encoding="utf-8"?>
-<p:sld xmlns:a="http://schemas.openxmlformats.org/drawingml/2006/main" xmlns:r="http://schemas.openxmlformats.org/officeDocument/2006/relationships" xmlns:p="http://schemas.openxmlformats.org/presentationml/2006/main">
-  <p:cSld>
-    <p:spTree>
-      <p:nvGrpSpPr>
-        <p:cNvPr id="1" name="">
-          <a:extLst>
-            <a:ext uri="{FF2B5EF4-FFF2-40B4-BE49-F238E27FC236}">
               <a16:creationId xmlns:a16="http://schemas.microsoft.com/office/drawing/2014/main" id="{B962A858-A60B-96A5-CF6F-34F144A14921}"/>
             </a:ext>
           </a:extLst>
@@ -6857,6 +6555,179 @@
     <p:extLst>
       <p:ext uri="{BB962C8B-B14F-4D97-AF65-F5344CB8AC3E}">
         <p14:creationId xmlns:p14="http://schemas.microsoft.com/office/powerpoint/2010/main" val="3364270860"/>
+      </p:ext>
+    </p:extLst>
+  </p:cSld>
+  <p:clrMapOvr>
+    <a:masterClrMapping/>
+  </p:clrMapOvr>
+</p:sld>
+</file>
+
+<file path=ppt/slides/slide11.xml><?xml version="1.0" encoding="utf-8"?>
+<p:sld xmlns:a="http://schemas.openxmlformats.org/drawingml/2006/main" xmlns:r="http://schemas.openxmlformats.org/officeDocument/2006/relationships" xmlns:p="http://schemas.openxmlformats.org/presentationml/2006/main">
+  <p:cSld>
+    <p:spTree>
+      <p:nvGrpSpPr>
+        <p:cNvPr id="1" name="">
+          <a:extLst>
+            <a:ext uri="{FF2B5EF4-FFF2-40B4-BE49-F238E27FC236}">
+              <a16:creationId xmlns:a16="http://schemas.microsoft.com/office/drawing/2014/main" id="{B9B9720C-84F1-7A46-0E07-D6C1CFA231A3}"/>
+            </a:ext>
+          </a:extLst>
+        </p:cNvPr>
+        <p:cNvGrpSpPr/>
+        <p:nvPr/>
+      </p:nvGrpSpPr>
+      <p:grpSpPr>
+        <a:xfrm>
+          <a:off x="0" y="0"/>
+          <a:ext cx="0" cy="0"/>
+          <a:chOff x="0" y="0"/>
+          <a:chExt cx="0" cy="0"/>
+        </a:xfrm>
+      </p:grpSpPr>
+      <p:sp>
+        <p:nvSpPr>
+          <p:cNvPr id="2" name="标题 1">
+            <a:extLst>
+              <a:ext uri="{FF2B5EF4-FFF2-40B4-BE49-F238E27FC236}">
+                <a16:creationId xmlns:a16="http://schemas.microsoft.com/office/drawing/2014/main" id="{139C98D6-3626-5B09-0E2E-ADE3ADE7AC7A}"/>
+              </a:ext>
+            </a:extLst>
+          </p:cNvPr>
+          <p:cNvSpPr>
+            <a:spLocks noGrp="1"/>
+          </p:cNvSpPr>
+          <p:nvPr>
+            <p:ph type="title"/>
+          </p:nvPr>
+        </p:nvSpPr>
+        <p:spPr>
+          <a:xfrm>
+            <a:off x="838200" y="365126"/>
+            <a:ext cx="10515600" cy="865534"/>
+          </a:xfrm>
+        </p:spPr>
+        <p:txBody>
+          <a:bodyPr>
+            <a:normAutofit/>
+          </a:bodyPr>
+          <a:lstStyle/>
+          <a:p>
+            <a:r>
+              <a:rPr lang="zh-CN" altLang="zh-CN" sz="3200" dirty="0"/>
+              <a:t>残差表示</a:t>
+            </a:r>
+            <a:endParaRPr lang="zh-CN" altLang="en-US" sz="2000" dirty="0"/>
+          </a:p>
+        </p:txBody>
+      </p:sp>
+      <p:pic>
+        <p:nvPicPr>
+          <p:cNvPr id="5" name="内容占位符 4">
+            <a:extLst>
+              <a:ext uri="{FF2B5EF4-FFF2-40B4-BE49-F238E27FC236}">
+                <a16:creationId xmlns:a16="http://schemas.microsoft.com/office/drawing/2014/main" id="{86838590-AA6D-534D-B0B2-C0D7A6CED647}"/>
+              </a:ext>
+            </a:extLst>
+          </p:cNvPr>
+          <p:cNvPicPr>
+            <a:picLocks noGrp="1" noChangeAspect="1"/>
+          </p:cNvPicPr>
+          <p:nvPr>
+            <p:ph idx="1"/>
+          </p:nvPr>
+        </p:nvPicPr>
+        <p:blipFill>
+          <a:blip r:embed="rId2">
+            <a:extLst>
+              <a:ext uri="{28A0092B-C50C-407E-A947-70E740481C1C}">
+                <a14:useLocalDpi xmlns:a14="http://schemas.microsoft.com/office/drawing/2010/main" val="0"/>
+              </a:ext>
+            </a:extLst>
+          </a:blip>
+          <a:stretch>
+            <a:fillRect/>
+          </a:stretch>
+        </p:blipFill>
+        <p:spPr>
+          <a:xfrm>
+            <a:off x="10488266" y="310124"/>
+            <a:ext cx="865534" cy="865534"/>
+          </a:xfrm>
+        </p:spPr>
+      </p:pic>
+      <p:cxnSp>
+        <p:nvCxnSpPr>
+          <p:cNvPr id="7" name="直接连接符 6">
+            <a:extLst>
+              <a:ext uri="{FF2B5EF4-FFF2-40B4-BE49-F238E27FC236}">
+                <a16:creationId xmlns:a16="http://schemas.microsoft.com/office/drawing/2014/main" id="{2F6BEF4F-7835-2EA0-86B0-B81AEB270B9F}"/>
+              </a:ext>
+            </a:extLst>
+          </p:cNvPr>
+          <p:cNvCxnSpPr/>
+          <p:nvPr/>
+        </p:nvCxnSpPr>
+        <p:spPr>
+          <a:xfrm>
+            <a:off x="893774" y="1236928"/>
+            <a:ext cx="10548000" cy="0"/>
+          </a:xfrm>
+          <a:prstGeom prst="line">
+            <a:avLst/>
+          </a:prstGeom>
+        </p:spPr>
+        <p:style>
+          <a:lnRef idx="1">
+            <a:schemeClr val="accent1"/>
+          </a:lnRef>
+          <a:fillRef idx="0">
+            <a:schemeClr val="accent1"/>
+          </a:fillRef>
+          <a:effectRef idx="0">
+            <a:schemeClr val="accent1"/>
+          </a:effectRef>
+          <a:fontRef idx="minor">
+            <a:schemeClr val="tx1"/>
+          </a:fontRef>
+        </p:style>
+      </p:cxnSp>
+      <p:pic>
+        <p:nvPicPr>
+          <p:cNvPr id="4" name="图片 3" descr="文本&#10;&#10;AI 生成的内容可能不正确。">
+            <a:extLst>
+              <a:ext uri="{FF2B5EF4-FFF2-40B4-BE49-F238E27FC236}">
+                <a16:creationId xmlns:a16="http://schemas.microsoft.com/office/drawing/2014/main" id="{55AE5C85-31B8-717E-1CAC-98FCA456D8F5}"/>
+              </a:ext>
+            </a:extLst>
+          </p:cNvPr>
+          <p:cNvPicPr>
+            <a:picLocks noChangeAspect="1"/>
+          </p:cNvPicPr>
+          <p:nvPr/>
+        </p:nvPicPr>
+        <p:blipFill>
+          <a:blip r:embed="rId3"/>
+          <a:stretch>
+            <a:fillRect/>
+          </a:stretch>
+        </p:blipFill>
+        <p:spPr>
+          <a:xfrm>
+            <a:off x="838200" y="2095848"/>
+            <a:ext cx="10288434" cy="3471436"/>
+          </a:xfrm>
+          <a:prstGeom prst="rect">
+            <a:avLst/>
+          </a:prstGeom>
+        </p:spPr>
+      </p:pic>
+    </p:spTree>
+    <p:extLst>
+      <p:ext uri="{BB962C8B-B14F-4D97-AF65-F5344CB8AC3E}">
+        <p14:creationId xmlns:p14="http://schemas.microsoft.com/office/powerpoint/2010/main" val="2179919058"/>
       </p:ext>
     </p:extLst>
   </p:cSld>
@@ -7326,7 +7197,7 @@
         <p:spPr>
           <a:xfrm>
             <a:off x="838200" y="1859339"/>
-            <a:ext cx="8039819" cy="3139321"/>
+            <a:ext cx="8405553" cy="2862322"/>
           </a:xfrm>
           <a:prstGeom prst="rect">
             <a:avLst/>
@@ -7743,6 +7614,66 @@
           </a:fontRef>
         </p:style>
       </p:cxnSp>
+      <p:pic>
+        <p:nvPicPr>
+          <p:cNvPr id="4" name="图片 3" descr="表格&#10;&#10;AI 生成的内容可能不正确。">
+            <a:extLst>
+              <a:ext uri="{FF2B5EF4-FFF2-40B4-BE49-F238E27FC236}">
+                <a16:creationId xmlns:a16="http://schemas.microsoft.com/office/drawing/2014/main" id="{B3AABF66-A268-C53D-AF9F-4362BB6C36A6}"/>
+              </a:ext>
+            </a:extLst>
+          </p:cNvPr>
+          <p:cNvPicPr>
+            <a:picLocks noChangeAspect="1"/>
+          </p:cNvPicPr>
+          <p:nvPr/>
+        </p:nvPicPr>
+        <p:blipFill>
+          <a:blip r:embed="rId3"/>
+          <a:stretch>
+            <a:fillRect/>
+          </a:stretch>
+        </p:blipFill>
+        <p:spPr>
+          <a:xfrm>
+            <a:off x="266007" y="2660450"/>
+            <a:ext cx="6382641" cy="2581635"/>
+          </a:xfrm>
+          <a:prstGeom prst="rect">
+            <a:avLst/>
+          </a:prstGeom>
+        </p:spPr>
+      </p:pic>
+      <p:pic>
+        <p:nvPicPr>
+          <p:cNvPr id="8" name="图片 7" descr="图示&#10;&#10;AI 生成的内容可能不正确。">
+            <a:extLst>
+              <a:ext uri="{FF2B5EF4-FFF2-40B4-BE49-F238E27FC236}">
+                <a16:creationId xmlns:a16="http://schemas.microsoft.com/office/drawing/2014/main" id="{265084A8-5A97-7E70-4A6C-78202AB20DAA}"/>
+              </a:ext>
+            </a:extLst>
+          </p:cNvPr>
+          <p:cNvPicPr>
+            <a:picLocks noChangeAspect="1"/>
+          </p:cNvPicPr>
+          <p:nvPr/>
+        </p:nvPicPr>
+        <p:blipFill>
+          <a:blip r:embed="rId4"/>
+          <a:stretch>
+            <a:fillRect/>
+          </a:stretch>
+        </p:blipFill>
+        <p:spPr>
+          <a:xfrm>
+            <a:off x="7180663" y="3004559"/>
+            <a:ext cx="4410691" cy="2095792"/>
+          </a:xfrm>
+          <a:prstGeom prst="rect">
+            <a:avLst/>
+          </a:prstGeom>
+        </p:spPr>
+      </p:pic>
     </p:spTree>
     <p:extLst>
       <p:ext uri="{BB962C8B-B14F-4D97-AF65-F5344CB8AC3E}">
@@ -7808,9 +7739,14 @@
           <a:lstStyle/>
           <a:p>
             <a:r>
-              <a:rPr lang="zh-CN" altLang="en-US" sz="3200" dirty="0"/>
-              <a:t>目录</a:t>
-            </a:r>
+              <a:rPr lang="en-US" altLang="zh-CN" sz="3200" dirty="0"/>
+              <a:t>SOTA</a:t>
+            </a:r>
+            <a:r>
+              <a:rPr lang="zh-CN" altLang="zh-CN" sz="3200" dirty="0"/>
+              <a:t>对比与成果</a:t>
+            </a:r>
+            <a:endParaRPr lang="zh-CN" altLang="en-US" sz="3200" dirty="0"/>
           </a:p>
         </p:txBody>
       </p:sp>
@@ -7855,6 +7791,386 @@
             <a:extLst>
               <a:ext uri="{FF2B5EF4-FFF2-40B4-BE49-F238E27FC236}">
                 <a16:creationId xmlns:a16="http://schemas.microsoft.com/office/drawing/2014/main" id="{D2B227EA-409D-5E9A-D6A7-6CD85964473E}"/>
+              </a:ext>
+            </a:extLst>
+          </p:cNvPr>
+          <p:cNvCxnSpPr/>
+          <p:nvPr/>
+        </p:nvCxnSpPr>
+        <p:spPr>
+          <a:xfrm>
+            <a:off x="893774" y="1236928"/>
+            <a:ext cx="10548000" cy="0"/>
+          </a:xfrm>
+          <a:prstGeom prst="line">
+            <a:avLst/>
+          </a:prstGeom>
+        </p:spPr>
+        <p:style>
+          <a:lnRef idx="1">
+            <a:schemeClr val="accent1"/>
+          </a:lnRef>
+          <a:fillRef idx="0">
+            <a:schemeClr val="accent1"/>
+          </a:fillRef>
+          <a:effectRef idx="0">
+            <a:schemeClr val="accent1"/>
+          </a:effectRef>
+          <a:fontRef idx="minor">
+            <a:schemeClr val="tx1"/>
+          </a:fontRef>
+        </p:style>
+      </p:cxnSp>
+      <p:pic>
+        <p:nvPicPr>
+          <p:cNvPr id="4" name="图片 3" descr="表格&#10;&#10;AI 生成的内容可能不正确。">
+            <a:extLst>
+              <a:ext uri="{FF2B5EF4-FFF2-40B4-BE49-F238E27FC236}">
+                <a16:creationId xmlns:a16="http://schemas.microsoft.com/office/drawing/2014/main" id="{A0A04460-61F1-CAF0-3A01-6D5D7AB1312D}"/>
+              </a:ext>
+            </a:extLst>
+          </p:cNvPr>
+          <p:cNvPicPr>
+            <a:picLocks noChangeAspect="1"/>
+          </p:cNvPicPr>
+          <p:nvPr/>
+        </p:nvPicPr>
+        <p:blipFill>
+          <a:blip r:embed="rId3"/>
+          <a:stretch>
+            <a:fillRect/>
+          </a:stretch>
+        </p:blipFill>
+        <p:spPr>
+          <a:xfrm>
+            <a:off x="3838898" y="1583072"/>
+            <a:ext cx="4048690" cy="4706007"/>
+          </a:xfrm>
+          <a:prstGeom prst="rect">
+            <a:avLst/>
+          </a:prstGeom>
+        </p:spPr>
+      </p:pic>
+    </p:spTree>
+    <p:extLst>
+      <p:ext uri="{BB962C8B-B14F-4D97-AF65-F5344CB8AC3E}">
+        <p14:creationId xmlns:p14="http://schemas.microsoft.com/office/powerpoint/2010/main" val="1773135142"/>
+      </p:ext>
+    </p:extLst>
+  </p:cSld>
+  <p:clrMapOvr>
+    <a:masterClrMapping/>
+  </p:clrMapOvr>
+</p:sld>
+</file>
+
+<file path=ppt/slides/slide18.xml><?xml version="1.0" encoding="utf-8"?>
+<p:sld xmlns:a="http://schemas.openxmlformats.org/drawingml/2006/main" xmlns:r="http://schemas.openxmlformats.org/officeDocument/2006/relationships" xmlns:p="http://schemas.openxmlformats.org/presentationml/2006/main">
+  <p:cSld>
+    <p:spTree>
+      <p:nvGrpSpPr>
+        <p:cNvPr id="1" name="">
+          <a:extLst>
+            <a:ext uri="{FF2B5EF4-FFF2-40B4-BE49-F238E27FC236}">
+              <a16:creationId xmlns:a16="http://schemas.microsoft.com/office/drawing/2014/main" id="{B5A59646-B645-D247-6753-92D5EE94828B}"/>
+            </a:ext>
+          </a:extLst>
+        </p:cNvPr>
+        <p:cNvGrpSpPr/>
+        <p:nvPr/>
+      </p:nvGrpSpPr>
+      <p:grpSpPr>
+        <a:xfrm>
+          <a:off x="0" y="0"/>
+          <a:ext cx="0" cy="0"/>
+          <a:chOff x="0" y="0"/>
+          <a:chExt cx="0" cy="0"/>
+        </a:xfrm>
+      </p:grpSpPr>
+      <p:sp>
+        <p:nvSpPr>
+          <p:cNvPr id="2" name="标题 1">
+            <a:extLst>
+              <a:ext uri="{FF2B5EF4-FFF2-40B4-BE49-F238E27FC236}">
+                <a16:creationId xmlns:a16="http://schemas.microsoft.com/office/drawing/2014/main" id="{EE86BA82-0FF0-2EA8-6A11-5FBC294E3991}"/>
+              </a:ext>
+            </a:extLst>
+          </p:cNvPr>
+          <p:cNvSpPr>
+            <a:spLocks noGrp="1"/>
+          </p:cNvSpPr>
+          <p:nvPr>
+            <p:ph type="title"/>
+          </p:nvPr>
+        </p:nvSpPr>
+        <p:spPr>
+          <a:xfrm>
+            <a:off x="838200" y="365126"/>
+            <a:ext cx="10515600" cy="865534"/>
+          </a:xfrm>
+        </p:spPr>
+        <p:txBody>
+          <a:bodyPr>
+            <a:normAutofit/>
+          </a:bodyPr>
+          <a:lstStyle/>
+          <a:p>
+            <a:r>
+              <a:rPr lang="zh-CN" altLang="en-US" sz="3200" dirty="0"/>
+              <a:t>深度分析与</a:t>
+            </a:r>
+            <a:r>
+              <a:rPr lang="en-US" altLang="zh-CN" sz="3200" dirty="0"/>
+              <a:t>CIFAR-10 </a:t>
+            </a:r>
+            <a:endParaRPr lang="zh-CN" altLang="en-US" sz="3200" dirty="0"/>
+          </a:p>
+        </p:txBody>
+      </p:sp>
+      <p:pic>
+        <p:nvPicPr>
+          <p:cNvPr id="5" name="内容占位符 4">
+            <a:extLst>
+              <a:ext uri="{FF2B5EF4-FFF2-40B4-BE49-F238E27FC236}">
+                <a16:creationId xmlns:a16="http://schemas.microsoft.com/office/drawing/2014/main" id="{3103A9FE-AE0E-37CB-A151-177AC5D3834E}"/>
+              </a:ext>
+            </a:extLst>
+          </p:cNvPr>
+          <p:cNvPicPr>
+            <a:picLocks noGrp="1" noChangeAspect="1"/>
+          </p:cNvPicPr>
+          <p:nvPr>
+            <p:ph idx="1"/>
+          </p:nvPr>
+        </p:nvPicPr>
+        <p:blipFill>
+          <a:blip r:embed="rId2">
+            <a:extLst>
+              <a:ext uri="{28A0092B-C50C-407E-A947-70E740481C1C}">
+                <a14:useLocalDpi xmlns:a14="http://schemas.microsoft.com/office/drawing/2010/main" val="0"/>
+              </a:ext>
+            </a:extLst>
+          </a:blip>
+          <a:stretch>
+            <a:fillRect/>
+          </a:stretch>
+        </p:blipFill>
+        <p:spPr>
+          <a:xfrm>
+            <a:off x="10488266" y="310124"/>
+            <a:ext cx="865534" cy="865534"/>
+          </a:xfrm>
+        </p:spPr>
+      </p:pic>
+      <p:cxnSp>
+        <p:nvCxnSpPr>
+          <p:cNvPr id="7" name="直接连接符 6">
+            <a:extLst>
+              <a:ext uri="{FF2B5EF4-FFF2-40B4-BE49-F238E27FC236}">
+                <a16:creationId xmlns:a16="http://schemas.microsoft.com/office/drawing/2014/main" id="{899D7B67-3A49-C7B3-056B-DE9FFC410888}"/>
+              </a:ext>
+            </a:extLst>
+          </p:cNvPr>
+          <p:cNvCxnSpPr/>
+          <p:nvPr/>
+        </p:nvCxnSpPr>
+        <p:spPr>
+          <a:xfrm>
+            <a:off x="893774" y="1236928"/>
+            <a:ext cx="10548000" cy="0"/>
+          </a:xfrm>
+          <a:prstGeom prst="line">
+            <a:avLst/>
+          </a:prstGeom>
+        </p:spPr>
+        <p:style>
+          <a:lnRef idx="1">
+            <a:schemeClr val="accent1"/>
+          </a:lnRef>
+          <a:fillRef idx="0">
+            <a:schemeClr val="accent1"/>
+          </a:fillRef>
+          <a:effectRef idx="0">
+            <a:schemeClr val="accent1"/>
+          </a:effectRef>
+          <a:fontRef idx="minor">
+            <a:schemeClr val="tx1"/>
+          </a:fontRef>
+        </p:style>
+      </p:cxnSp>
+      <p:pic>
+        <p:nvPicPr>
+          <p:cNvPr id="8" name="图片 7" descr="直方图&#10;&#10;AI 生成的内容可能不正确。">
+            <a:extLst>
+              <a:ext uri="{FF2B5EF4-FFF2-40B4-BE49-F238E27FC236}">
+                <a16:creationId xmlns:a16="http://schemas.microsoft.com/office/drawing/2014/main" id="{29C2D17F-BEA8-DEF4-B856-3DBB132FA326}"/>
+              </a:ext>
+            </a:extLst>
+          </p:cNvPr>
+          <p:cNvPicPr>
+            <a:picLocks noChangeAspect="1"/>
+          </p:cNvPicPr>
+          <p:nvPr/>
+        </p:nvPicPr>
+        <p:blipFill>
+          <a:blip r:embed="rId3"/>
+          <a:stretch>
+            <a:fillRect/>
+          </a:stretch>
+        </p:blipFill>
+        <p:spPr>
+          <a:xfrm>
+            <a:off x="1623388" y="1548526"/>
+            <a:ext cx="8945223" cy="2181529"/>
+          </a:xfrm>
+          <a:prstGeom prst="rect">
+            <a:avLst/>
+          </a:prstGeom>
+        </p:spPr>
+      </p:pic>
+      <p:pic>
+        <p:nvPicPr>
+          <p:cNvPr id="10" name="图片 9" descr="图片包含 图示&#10;&#10;AI 生成的内容可能不正确。">
+            <a:extLst>
+              <a:ext uri="{FF2B5EF4-FFF2-40B4-BE49-F238E27FC236}">
+                <a16:creationId xmlns:a16="http://schemas.microsoft.com/office/drawing/2014/main" id="{E0D0C688-6E69-1182-4A6C-ADFA65BF3A5C}"/>
+              </a:ext>
+            </a:extLst>
+          </p:cNvPr>
+          <p:cNvPicPr>
+            <a:picLocks noChangeAspect="1"/>
+          </p:cNvPicPr>
+          <p:nvPr/>
+        </p:nvPicPr>
+        <p:blipFill>
+          <a:blip r:embed="rId4"/>
+          <a:stretch>
+            <a:fillRect/>
+          </a:stretch>
+        </p:blipFill>
+        <p:spPr>
+          <a:xfrm>
+            <a:off x="3607173" y="3847182"/>
+            <a:ext cx="4163006" cy="2924583"/>
+          </a:xfrm>
+          <a:prstGeom prst="rect">
+            <a:avLst/>
+          </a:prstGeom>
+        </p:spPr>
+      </p:pic>
+    </p:spTree>
+    <p:extLst>
+      <p:ext uri="{BB962C8B-B14F-4D97-AF65-F5344CB8AC3E}">
+        <p14:creationId xmlns:p14="http://schemas.microsoft.com/office/powerpoint/2010/main" val="1167817520"/>
+      </p:ext>
+    </p:extLst>
+  </p:cSld>
+  <p:clrMapOvr>
+    <a:masterClrMapping/>
+  </p:clrMapOvr>
+</p:sld>
+</file>
+
+<file path=ppt/slides/slide19.xml><?xml version="1.0" encoding="utf-8"?>
+<p:sld xmlns:a="http://schemas.openxmlformats.org/drawingml/2006/main" xmlns:r="http://schemas.openxmlformats.org/officeDocument/2006/relationships" xmlns:p="http://schemas.openxmlformats.org/presentationml/2006/main">
+  <p:cSld>
+    <p:spTree>
+      <p:nvGrpSpPr>
+        <p:cNvPr id="1" name="">
+          <a:extLst>
+            <a:ext uri="{FF2B5EF4-FFF2-40B4-BE49-F238E27FC236}">
+              <a16:creationId xmlns:a16="http://schemas.microsoft.com/office/drawing/2014/main" id="{66690B9B-4E6E-E451-0E41-AB8B58B3378C}"/>
+            </a:ext>
+          </a:extLst>
+        </p:cNvPr>
+        <p:cNvGrpSpPr/>
+        <p:nvPr/>
+      </p:nvGrpSpPr>
+      <p:grpSpPr>
+        <a:xfrm>
+          <a:off x="0" y="0"/>
+          <a:ext cx="0" cy="0"/>
+          <a:chOff x="0" y="0"/>
+          <a:chExt cx="0" cy="0"/>
+        </a:xfrm>
+      </p:grpSpPr>
+      <p:sp>
+        <p:nvSpPr>
+          <p:cNvPr id="2" name="标题 1">
+            <a:extLst>
+              <a:ext uri="{FF2B5EF4-FFF2-40B4-BE49-F238E27FC236}">
+                <a16:creationId xmlns:a16="http://schemas.microsoft.com/office/drawing/2014/main" id="{698EB520-984A-05BD-1ABB-8306CC203198}"/>
+              </a:ext>
+            </a:extLst>
+          </p:cNvPr>
+          <p:cNvSpPr>
+            <a:spLocks noGrp="1"/>
+          </p:cNvSpPr>
+          <p:nvPr>
+            <p:ph type="title"/>
+          </p:nvPr>
+        </p:nvSpPr>
+        <p:spPr>
+          <a:xfrm>
+            <a:off x="838200" y="3315359"/>
+            <a:ext cx="10515600" cy="865534"/>
+          </a:xfrm>
+        </p:spPr>
+        <p:txBody>
+          <a:bodyPr>
+            <a:normAutofit/>
+          </a:bodyPr>
+          <a:lstStyle/>
+          <a:p>
+            <a:pPr algn="ctr"/>
+            <a:r>
+              <a:rPr lang="zh-CN" altLang="en-US" sz="3200" dirty="0"/>
+              <a:t>课程联系</a:t>
+            </a:r>
+          </a:p>
+        </p:txBody>
+      </p:sp>
+      <p:pic>
+        <p:nvPicPr>
+          <p:cNvPr id="5" name="内容占位符 4">
+            <a:extLst>
+              <a:ext uri="{FF2B5EF4-FFF2-40B4-BE49-F238E27FC236}">
+                <a16:creationId xmlns:a16="http://schemas.microsoft.com/office/drawing/2014/main" id="{6EAE4515-C586-2BE7-FC65-7B1E2C22BDBA}"/>
+              </a:ext>
+            </a:extLst>
+          </p:cNvPr>
+          <p:cNvPicPr>
+            <a:picLocks noGrp="1" noChangeAspect="1"/>
+          </p:cNvPicPr>
+          <p:nvPr>
+            <p:ph idx="1"/>
+          </p:nvPr>
+        </p:nvPicPr>
+        <p:blipFill>
+          <a:blip r:embed="rId2">
+            <a:extLst>
+              <a:ext uri="{28A0092B-C50C-407E-A947-70E740481C1C}">
+                <a14:useLocalDpi xmlns:a14="http://schemas.microsoft.com/office/drawing/2010/main" val="0"/>
+              </a:ext>
+            </a:extLst>
+          </a:blip>
+          <a:stretch>
+            <a:fillRect/>
+          </a:stretch>
+        </p:blipFill>
+        <p:spPr>
+          <a:xfrm>
+            <a:off x="10488266" y="310124"/>
+            <a:ext cx="865534" cy="865534"/>
+          </a:xfrm>
+        </p:spPr>
+      </p:pic>
+      <p:cxnSp>
+        <p:nvCxnSpPr>
+          <p:cNvPr id="7" name="直接连接符 6">
+            <a:extLst>
+              <a:ext uri="{FF2B5EF4-FFF2-40B4-BE49-F238E27FC236}">
+                <a16:creationId xmlns:a16="http://schemas.microsoft.com/office/drawing/2014/main" id="{F2758D5C-BA74-638C-CB71-9C02C60208FD}"/>
               </a:ext>
             </a:extLst>
           </p:cNvPr>
@@ -7888,7 +8204,7 @@
     </p:spTree>
     <p:extLst>
       <p:ext uri="{BB962C8B-B14F-4D97-AF65-F5344CB8AC3E}">
-        <p14:creationId xmlns:p14="http://schemas.microsoft.com/office/powerpoint/2010/main" val="1773135142"/>
+        <p14:creationId xmlns:p14="http://schemas.microsoft.com/office/powerpoint/2010/main" val="1030231574"/>
       </p:ext>
     </p:extLst>
   </p:cSld>
@@ -8040,7 +8356,7 @@
           <p:nvPr>
             <p:extLst>
               <p:ext uri="{D42A27DB-BD31-4B8C-83A1-F6EECF244321}">
-                <p14:modId xmlns:p14="http://schemas.microsoft.com/office/powerpoint/2010/main" val="1901453844"/>
+                <p14:modId xmlns:p14="http://schemas.microsoft.com/office/powerpoint/2010/main" val="3246969330"/>
               </p:ext>
             </p:extLst>
           </p:nvPr>
@@ -8059,6 +8375,254 @@
     <p:extLst>
       <p:ext uri="{BB962C8B-B14F-4D97-AF65-F5344CB8AC3E}">
         <p14:creationId xmlns:p14="http://schemas.microsoft.com/office/powerpoint/2010/main" val="2681310894"/>
+      </p:ext>
+    </p:extLst>
+  </p:cSld>
+  <p:clrMapOvr>
+    <a:masterClrMapping/>
+  </p:clrMapOvr>
+</p:sld>
+</file>
+
+<file path=ppt/slides/slide20.xml><?xml version="1.0" encoding="utf-8"?>
+<p:sld xmlns:a="http://schemas.openxmlformats.org/drawingml/2006/main" xmlns:r="http://schemas.openxmlformats.org/officeDocument/2006/relationships" xmlns:p="http://schemas.openxmlformats.org/presentationml/2006/main">
+  <p:cSld>
+    <p:spTree>
+      <p:nvGrpSpPr>
+        <p:cNvPr id="1" name="">
+          <a:extLst>
+            <a:ext uri="{FF2B5EF4-FFF2-40B4-BE49-F238E27FC236}">
+              <a16:creationId xmlns:a16="http://schemas.microsoft.com/office/drawing/2014/main" id="{2BC0BA8B-BDC6-4853-01E5-FC1977877375}"/>
+            </a:ext>
+          </a:extLst>
+        </p:cNvPr>
+        <p:cNvGrpSpPr/>
+        <p:nvPr/>
+      </p:nvGrpSpPr>
+      <p:grpSpPr>
+        <a:xfrm>
+          <a:off x="0" y="0"/>
+          <a:ext cx="0" cy="0"/>
+          <a:chOff x="0" y="0"/>
+          <a:chExt cx="0" cy="0"/>
+        </a:xfrm>
+      </p:grpSpPr>
+      <p:sp>
+        <p:nvSpPr>
+          <p:cNvPr id="2" name="标题 1">
+            <a:extLst>
+              <a:ext uri="{FF2B5EF4-FFF2-40B4-BE49-F238E27FC236}">
+                <a16:creationId xmlns:a16="http://schemas.microsoft.com/office/drawing/2014/main" id="{AED262F6-2302-A840-B3B7-E054B90618A3}"/>
+              </a:ext>
+            </a:extLst>
+          </p:cNvPr>
+          <p:cNvSpPr>
+            <a:spLocks noGrp="1"/>
+          </p:cNvSpPr>
+          <p:nvPr>
+            <p:ph type="title"/>
+          </p:nvPr>
+        </p:nvSpPr>
+        <p:spPr>
+          <a:xfrm>
+            <a:off x="893774" y="1661910"/>
+            <a:ext cx="10515600" cy="4885963"/>
+          </a:xfrm>
+        </p:spPr>
+        <p:txBody>
+          <a:bodyPr>
+            <a:normAutofit/>
+          </a:bodyPr>
+          <a:lstStyle/>
+          <a:p>
+            <a:r>
+              <a:rPr lang="en-US" altLang="zh-CN" sz="2000" dirty="0"/>
+              <a:t>1.</a:t>
+            </a:r>
+            <a:r>
+              <a:rPr lang="zh-CN" altLang="en-US" sz="2000" dirty="0"/>
+              <a:t>对深度学习的贡献：重新定义了“深度”</a:t>
+            </a:r>
+            <a:br>
+              <a:rPr lang="en-US" altLang="zh-CN" sz="2000" dirty="0"/>
+            </a:br>
+            <a:br>
+              <a:rPr lang="en-US" altLang="zh-CN" sz="2000" dirty="0"/>
+            </a:br>
+            <a:br>
+              <a:rPr lang="en-US" altLang="zh-CN" sz="2000" dirty="0"/>
+            </a:br>
+            <a:br>
+              <a:rPr lang="en-US" altLang="zh-CN" sz="2000" dirty="0"/>
+            </a:br>
+            <a:r>
+              <a:rPr lang="en-US" altLang="zh-CN" sz="2000" dirty="0"/>
+              <a:t>2.</a:t>
+            </a:r>
+            <a:r>
+              <a:rPr lang="zh-CN" altLang="en-US" sz="2000" dirty="0"/>
+              <a:t>对“检测”与“分割”的贡献：提供了最强的特征提取器</a:t>
+            </a:r>
+            <a:br>
+              <a:rPr lang="en-US" altLang="zh-CN" sz="2000" dirty="0"/>
+            </a:br>
+            <a:br>
+              <a:rPr lang="en-US" altLang="zh-CN" sz="2000" dirty="0"/>
+            </a:br>
+            <a:br>
+              <a:rPr lang="en-US" altLang="zh-CN" sz="2000" dirty="0"/>
+            </a:br>
+            <a:br>
+              <a:rPr lang="en-US" altLang="zh-CN" sz="2000" dirty="0"/>
+            </a:br>
+            <a:r>
+              <a:rPr lang="en-US" altLang="zh-CN" sz="2000" dirty="0"/>
+              <a:t>3.</a:t>
+            </a:r>
+            <a:r>
+              <a:rPr lang="zh-CN" altLang="en-US" sz="2000" dirty="0"/>
+              <a:t>对“底层视觉”与“图像复原”的贡献：残差学习思想的直接应用</a:t>
+            </a:r>
+            <a:br>
+              <a:rPr lang="en-US" altLang="zh-CN" sz="2000" dirty="0"/>
+            </a:br>
+            <a:br>
+              <a:rPr lang="en-US" altLang="zh-CN" sz="2000" dirty="0"/>
+            </a:br>
+            <a:br>
+              <a:rPr lang="en-US" altLang="zh-CN" sz="2000" dirty="0"/>
+            </a:br>
+            <a:br>
+              <a:rPr lang="en-US" altLang="zh-CN" sz="2000" dirty="0"/>
+            </a:br>
+            <a:r>
+              <a:rPr lang="en-US" altLang="zh-CN" sz="2000" dirty="0"/>
+              <a:t>4.</a:t>
+            </a:r>
+            <a:r>
+              <a:rPr lang="zh-CN" altLang="zh-CN" sz="2200" dirty="0"/>
+              <a:t>对</a:t>
+            </a:r>
+            <a:r>
+              <a:rPr lang="en-US" altLang="zh-CN" sz="2200" dirty="0"/>
+              <a:t>“</a:t>
+            </a:r>
+            <a:r>
+              <a:rPr lang="zh-CN" altLang="zh-CN" sz="2200" dirty="0"/>
+              <a:t>特征提取</a:t>
+            </a:r>
+            <a:r>
+              <a:rPr lang="en-US" altLang="zh-CN" sz="2200" dirty="0"/>
+              <a:t>”</a:t>
+            </a:r>
+            <a:r>
+              <a:rPr lang="zh-CN" altLang="zh-CN" sz="2200" dirty="0"/>
+              <a:t>与</a:t>
+            </a:r>
+            <a:r>
+              <a:rPr lang="en-US" altLang="zh-CN" sz="2200" dirty="0"/>
+              <a:t>“</a:t>
+            </a:r>
+            <a:r>
+              <a:rPr lang="zh-CN" altLang="zh-CN" sz="2200" dirty="0"/>
+              <a:t>视觉重建</a:t>
+            </a:r>
+            <a:r>
+              <a:rPr lang="en-US" altLang="zh-CN" sz="2200" dirty="0"/>
+              <a:t>”</a:t>
+            </a:r>
+            <a:r>
+              <a:rPr lang="zh-CN" altLang="zh-CN" sz="2200" dirty="0"/>
+              <a:t>的贡献：从手工特征到深度特征的转折</a:t>
+            </a:r>
+            <a:br>
+              <a:rPr lang="en-US" altLang="zh-CN" sz="2000" dirty="0"/>
+            </a:br>
+            <a:br>
+              <a:rPr lang="en-US" altLang="zh-CN" sz="2000" dirty="0"/>
+            </a:br>
+            <a:br>
+              <a:rPr lang="en-US" altLang="zh-CN" sz="2000" dirty="0"/>
+            </a:br>
+            <a:endParaRPr lang="zh-CN" altLang="en-US" sz="2000" dirty="0"/>
+          </a:p>
+        </p:txBody>
+      </p:sp>
+      <p:pic>
+        <p:nvPicPr>
+          <p:cNvPr id="5" name="内容占位符 4">
+            <a:extLst>
+              <a:ext uri="{FF2B5EF4-FFF2-40B4-BE49-F238E27FC236}">
+                <a16:creationId xmlns:a16="http://schemas.microsoft.com/office/drawing/2014/main" id="{02A3E16B-610F-2E88-DF16-CED108C378A9}"/>
+              </a:ext>
+            </a:extLst>
+          </p:cNvPr>
+          <p:cNvPicPr>
+            <a:picLocks noGrp="1" noChangeAspect="1"/>
+          </p:cNvPicPr>
+          <p:nvPr>
+            <p:ph idx="1"/>
+          </p:nvPr>
+        </p:nvPicPr>
+        <p:blipFill>
+          <a:blip r:embed="rId2">
+            <a:extLst>
+              <a:ext uri="{28A0092B-C50C-407E-A947-70E740481C1C}">
+                <a14:useLocalDpi xmlns:a14="http://schemas.microsoft.com/office/drawing/2010/main" val="0"/>
+              </a:ext>
+            </a:extLst>
+          </a:blip>
+          <a:stretch>
+            <a:fillRect/>
+          </a:stretch>
+        </p:blipFill>
+        <p:spPr>
+          <a:xfrm>
+            <a:off x="10488266" y="310124"/>
+            <a:ext cx="865534" cy="865534"/>
+          </a:xfrm>
+        </p:spPr>
+      </p:pic>
+      <p:cxnSp>
+        <p:nvCxnSpPr>
+          <p:cNvPr id="7" name="直接连接符 6">
+            <a:extLst>
+              <a:ext uri="{FF2B5EF4-FFF2-40B4-BE49-F238E27FC236}">
+                <a16:creationId xmlns:a16="http://schemas.microsoft.com/office/drawing/2014/main" id="{49C0F749-54D1-75F2-8922-96833460EAD0}"/>
+              </a:ext>
+            </a:extLst>
+          </p:cNvPr>
+          <p:cNvCxnSpPr/>
+          <p:nvPr/>
+        </p:nvCxnSpPr>
+        <p:spPr>
+          <a:xfrm>
+            <a:off x="893774" y="1236928"/>
+            <a:ext cx="10548000" cy="0"/>
+          </a:xfrm>
+          <a:prstGeom prst="line">
+            <a:avLst/>
+          </a:prstGeom>
+        </p:spPr>
+        <p:style>
+          <a:lnRef idx="1">
+            <a:schemeClr val="accent1"/>
+          </a:lnRef>
+          <a:fillRef idx="0">
+            <a:schemeClr val="accent1"/>
+          </a:fillRef>
+          <a:effectRef idx="0">
+            <a:schemeClr val="accent1"/>
+          </a:effectRef>
+          <a:fontRef idx="minor">
+            <a:schemeClr val="tx1"/>
+          </a:fontRef>
+        </p:style>
+      </p:cxnSp>
+    </p:spTree>
+    <p:extLst>
+      <p:ext uri="{BB962C8B-B14F-4D97-AF65-F5344CB8AC3E}">
+        <p14:creationId xmlns:p14="http://schemas.microsoft.com/office/powerpoint/2010/main" val="3401484758"/>
       </p:ext>
     </p:extLst>
   </p:cSld>
@@ -8373,19 +8937,11 @@
             </a:pPr>
             <a:r>
               <a:rPr lang="zh-CN" altLang="en-US" dirty="0"/>
-              <a:t>深度卷积神经网络是一种多层架构，旨在确保网络对输入的</a:t>
+              <a:t>深度卷积神经网络是一种多层架构，旨在确保网络对输入的 </a:t>
             </a:r>
             <a:r>
               <a:rPr lang="zh-CN" altLang="en-US" b="1" dirty="0"/>
               <a:t>平移、缩放和变形 </a:t>
-            </a:r>
-            <a:r>
-              <a:rPr lang="en-US" altLang="zh-CN" b="1" dirty="0"/>
-              <a:t>(Shift, scale, and distortion)</a:t>
-            </a:r>
-            <a:r>
-              <a:rPr lang="en-US" altLang="zh-CN" dirty="0"/>
-              <a:t> </a:t>
             </a:r>
             <a:r>
               <a:rPr lang="zh-CN" altLang="en-US" dirty="0"/>
@@ -8478,15 +9034,7 @@
             </a:r>
             <a:r>
               <a:rPr lang="zh-CN" altLang="en-US" dirty="0"/>
-              <a:t>即池化 </a:t>
-            </a:r>
-            <a:r>
-              <a:rPr lang="en-US" altLang="zh-CN" dirty="0"/>
-              <a:t>(Pooling)</a:t>
-            </a:r>
-            <a:r>
-              <a:rPr lang="zh-CN" altLang="en-US" dirty="0"/>
-              <a:t>，用于降低特征图的空间分辨率并获得平移不变性。</a:t>
+              <a:t>即池化，用于降低特征图的空间分辨率并获得平移不变性。</a:t>
             </a:r>
             <a:endParaRPr lang="en-US" altLang="zh-CN" dirty="0"/>
           </a:p>
@@ -8964,179 +9512,6 @@
         <p:cNvPr id="1" name="">
           <a:extLst>
             <a:ext uri="{FF2B5EF4-FFF2-40B4-BE49-F238E27FC236}">
-              <a16:creationId xmlns:a16="http://schemas.microsoft.com/office/drawing/2014/main" id="{B9B9720C-84F1-7A46-0E07-D6C1CFA231A3}"/>
-            </a:ext>
-          </a:extLst>
-        </p:cNvPr>
-        <p:cNvGrpSpPr/>
-        <p:nvPr/>
-      </p:nvGrpSpPr>
-      <p:grpSpPr>
-        <a:xfrm>
-          <a:off x="0" y="0"/>
-          <a:ext cx="0" cy="0"/>
-          <a:chOff x="0" y="0"/>
-          <a:chExt cx="0" cy="0"/>
-        </a:xfrm>
-      </p:grpSpPr>
-      <p:sp>
-        <p:nvSpPr>
-          <p:cNvPr id="2" name="标题 1">
-            <a:extLst>
-              <a:ext uri="{FF2B5EF4-FFF2-40B4-BE49-F238E27FC236}">
-                <a16:creationId xmlns:a16="http://schemas.microsoft.com/office/drawing/2014/main" id="{139C98D6-3626-5B09-0E2E-ADE3ADE7AC7A}"/>
-              </a:ext>
-            </a:extLst>
-          </p:cNvPr>
-          <p:cNvSpPr>
-            <a:spLocks noGrp="1"/>
-          </p:cNvSpPr>
-          <p:nvPr>
-            <p:ph type="title"/>
-          </p:nvPr>
-        </p:nvSpPr>
-        <p:spPr>
-          <a:xfrm>
-            <a:off x="838200" y="365126"/>
-            <a:ext cx="10515600" cy="865534"/>
-          </a:xfrm>
-        </p:spPr>
-        <p:txBody>
-          <a:bodyPr>
-            <a:normAutofit/>
-          </a:bodyPr>
-          <a:lstStyle/>
-          <a:p>
-            <a:r>
-              <a:rPr lang="zh-CN" altLang="zh-CN" sz="3200" dirty="0"/>
-              <a:t>残差表示</a:t>
-            </a:r>
-            <a:endParaRPr lang="zh-CN" altLang="en-US" sz="2000" dirty="0"/>
-          </a:p>
-        </p:txBody>
-      </p:sp>
-      <p:pic>
-        <p:nvPicPr>
-          <p:cNvPr id="5" name="内容占位符 4">
-            <a:extLst>
-              <a:ext uri="{FF2B5EF4-FFF2-40B4-BE49-F238E27FC236}">
-                <a16:creationId xmlns:a16="http://schemas.microsoft.com/office/drawing/2014/main" id="{86838590-AA6D-534D-B0B2-C0D7A6CED647}"/>
-              </a:ext>
-            </a:extLst>
-          </p:cNvPr>
-          <p:cNvPicPr>
-            <a:picLocks noGrp="1" noChangeAspect="1"/>
-          </p:cNvPicPr>
-          <p:nvPr>
-            <p:ph idx="1"/>
-          </p:nvPr>
-        </p:nvPicPr>
-        <p:blipFill>
-          <a:blip r:embed="rId2">
-            <a:extLst>
-              <a:ext uri="{28A0092B-C50C-407E-A947-70E740481C1C}">
-                <a14:useLocalDpi xmlns:a14="http://schemas.microsoft.com/office/drawing/2010/main" val="0"/>
-              </a:ext>
-            </a:extLst>
-          </a:blip>
-          <a:stretch>
-            <a:fillRect/>
-          </a:stretch>
-        </p:blipFill>
-        <p:spPr>
-          <a:xfrm>
-            <a:off x="10488266" y="310124"/>
-            <a:ext cx="865534" cy="865534"/>
-          </a:xfrm>
-        </p:spPr>
-      </p:pic>
-      <p:cxnSp>
-        <p:nvCxnSpPr>
-          <p:cNvPr id="7" name="直接连接符 6">
-            <a:extLst>
-              <a:ext uri="{FF2B5EF4-FFF2-40B4-BE49-F238E27FC236}">
-                <a16:creationId xmlns:a16="http://schemas.microsoft.com/office/drawing/2014/main" id="{2F6BEF4F-7835-2EA0-86B0-B81AEB270B9F}"/>
-              </a:ext>
-            </a:extLst>
-          </p:cNvPr>
-          <p:cNvCxnSpPr/>
-          <p:nvPr/>
-        </p:nvCxnSpPr>
-        <p:spPr>
-          <a:xfrm>
-            <a:off x="893774" y="1236928"/>
-            <a:ext cx="10548000" cy="0"/>
-          </a:xfrm>
-          <a:prstGeom prst="line">
-            <a:avLst/>
-          </a:prstGeom>
-        </p:spPr>
-        <p:style>
-          <a:lnRef idx="1">
-            <a:schemeClr val="accent1"/>
-          </a:lnRef>
-          <a:fillRef idx="0">
-            <a:schemeClr val="accent1"/>
-          </a:fillRef>
-          <a:effectRef idx="0">
-            <a:schemeClr val="accent1"/>
-          </a:effectRef>
-          <a:fontRef idx="minor">
-            <a:schemeClr val="tx1"/>
-          </a:fontRef>
-        </p:style>
-      </p:cxnSp>
-      <p:pic>
-        <p:nvPicPr>
-          <p:cNvPr id="4" name="图片 3" descr="文本&#10;&#10;AI 生成的内容可能不正确。">
-            <a:extLst>
-              <a:ext uri="{FF2B5EF4-FFF2-40B4-BE49-F238E27FC236}">
-                <a16:creationId xmlns:a16="http://schemas.microsoft.com/office/drawing/2014/main" id="{55AE5C85-31B8-717E-1CAC-98FCA456D8F5}"/>
-              </a:ext>
-            </a:extLst>
-          </p:cNvPr>
-          <p:cNvPicPr>
-            <a:picLocks noChangeAspect="1"/>
-          </p:cNvPicPr>
-          <p:nvPr/>
-        </p:nvPicPr>
-        <p:blipFill>
-          <a:blip r:embed="rId3"/>
-          <a:stretch>
-            <a:fillRect/>
-          </a:stretch>
-        </p:blipFill>
-        <p:spPr>
-          <a:xfrm>
-            <a:off x="838200" y="2095848"/>
-            <a:ext cx="10288434" cy="3471436"/>
-          </a:xfrm>
-          <a:prstGeom prst="rect">
-            <a:avLst/>
-          </a:prstGeom>
-        </p:spPr>
-      </p:pic>
-    </p:spTree>
-    <p:extLst>
-      <p:ext uri="{BB962C8B-B14F-4D97-AF65-F5344CB8AC3E}">
-        <p14:creationId xmlns:p14="http://schemas.microsoft.com/office/powerpoint/2010/main" val="2179919058"/>
-      </p:ext>
-    </p:extLst>
-  </p:cSld>
-  <p:clrMapOvr>
-    <a:masterClrMapping/>
-  </p:clrMapOvr>
-</p:sld>
-</file>
-
-<file path=ppt/slides/slide8.xml><?xml version="1.0" encoding="utf-8"?>
-<p:sld xmlns:a="http://schemas.openxmlformats.org/drawingml/2006/main" xmlns:r="http://schemas.openxmlformats.org/officeDocument/2006/relationships" xmlns:p="http://schemas.openxmlformats.org/presentationml/2006/main">
-  <p:cSld>
-    <p:spTree>
-      <p:nvGrpSpPr>
-        <p:cNvPr id="1" name="">
-          <a:extLst>
-            <a:ext uri="{FF2B5EF4-FFF2-40B4-BE49-F238E27FC236}">
               <a16:creationId xmlns:a16="http://schemas.microsoft.com/office/drawing/2014/main" id="{8549377F-F1BF-1F5B-3FA7-C4ADC6AF8AC3}"/>
             </a:ext>
           </a:extLst>
@@ -9272,7 +9647,7 @@
 </p:sld>
 </file>
 
-<file path=ppt/slides/slide9.xml><?xml version="1.0" encoding="utf-8"?>
+<file path=ppt/slides/slide8.xml><?xml version="1.0" encoding="utf-8"?>
 <p:sld xmlns:a="http://schemas.openxmlformats.org/drawingml/2006/main" xmlns:r="http://schemas.openxmlformats.org/officeDocument/2006/relationships" xmlns:p="http://schemas.openxmlformats.org/presentationml/2006/main">
   <p:cSld>
     <p:spTree>
@@ -9479,6 +9854,255 @@
     <p:extLst>
       <p:ext uri="{BB962C8B-B14F-4D97-AF65-F5344CB8AC3E}">
         <p14:creationId xmlns:p14="http://schemas.microsoft.com/office/powerpoint/2010/main" val="3353510254"/>
+      </p:ext>
+    </p:extLst>
+  </p:cSld>
+  <p:clrMapOvr>
+    <a:masterClrMapping/>
+  </p:clrMapOvr>
+</p:sld>
+</file>
+
+<file path=ppt/slides/slide9.xml><?xml version="1.0" encoding="utf-8"?>
+<p:sld xmlns:a="http://schemas.openxmlformats.org/drawingml/2006/main" xmlns:r="http://schemas.openxmlformats.org/officeDocument/2006/relationships" xmlns:p="http://schemas.openxmlformats.org/presentationml/2006/main">
+  <p:cSld>
+    <p:spTree>
+      <p:nvGrpSpPr>
+        <p:cNvPr id="1" name="">
+          <a:extLst>
+            <a:ext uri="{FF2B5EF4-FFF2-40B4-BE49-F238E27FC236}">
+              <a16:creationId xmlns:a16="http://schemas.microsoft.com/office/drawing/2014/main" id="{2E373269-38A4-E115-39E4-BDDB9804532E}"/>
+            </a:ext>
+          </a:extLst>
+        </p:cNvPr>
+        <p:cNvGrpSpPr/>
+        <p:nvPr/>
+      </p:nvGrpSpPr>
+      <p:grpSpPr>
+        <a:xfrm>
+          <a:off x="0" y="0"/>
+          <a:ext cx="0" cy="0"/>
+          <a:chOff x="0" y="0"/>
+          <a:chExt cx="0" cy="0"/>
+        </a:xfrm>
+      </p:grpSpPr>
+      <p:sp>
+        <p:nvSpPr>
+          <p:cNvPr id="2" name="标题 1">
+            <a:extLst>
+              <a:ext uri="{FF2B5EF4-FFF2-40B4-BE49-F238E27FC236}">
+                <a16:creationId xmlns:a16="http://schemas.microsoft.com/office/drawing/2014/main" id="{689A58A5-E60D-69D1-2B23-E2BEE773EEE4}"/>
+              </a:ext>
+            </a:extLst>
+          </p:cNvPr>
+          <p:cNvSpPr>
+            <a:spLocks noGrp="1"/>
+          </p:cNvSpPr>
+          <p:nvPr>
+            <p:ph type="title"/>
+          </p:nvPr>
+        </p:nvSpPr>
+        <p:spPr>
+          <a:xfrm>
+            <a:off x="838200" y="365126"/>
+            <a:ext cx="10515600" cy="865534"/>
+          </a:xfrm>
+        </p:spPr>
+        <p:txBody>
+          <a:bodyPr>
+            <a:normAutofit/>
+          </a:bodyPr>
+          <a:lstStyle/>
+          <a:p>
+            <a:r>
+              <a:rPr lang="zh-CN" altLang="en-US" sz="3200" dirty="0"/>
+              <a:t>捷径连接</a:t>
+            </a:r>
+            <a:endParaRPr lang="zh-CN" altLang="en-US" sz="2000" dirty="0"/>
+          </a:p>
+        </p:txBody>
+      </p:sp>
+      <p:pic>
+        <p:nvPicPr>
+          <p:cNvPr id="5" name="内容占位符 4">
+            <a:extLst>
+              <a:ext uri="{FF2B5EF4-FFF2-40B4-BE49-F238E27FC236}">
+                <a16:creationId xmlns:a16="http://schemas.microsoft.com/office/drawing/2014/main" id="{C4083615-0C5E-4E49-39E7-3FB3B8EB22E0}"/>
+              </a:ext>
+            </a:extLst>
+          </p:cNvPr>
+          <p:cNvPicPr>
+            <a:picLocks noGrp="1" noChangeAspect="1"/>
+          </p:cNvPicPr>
+          <p:nvPr>
+            <p:ph idx="1"/>
+          </p:nvPr>
+        </p:nvPicPr>
+        <p:blipFill>
+          <a:blip r:embed="rId2">
+            <a:extLst>
+              <a:ext uri="{28A0092B-C50C-407E-A947-70E740481C1C}">
+                <a14:useLocalDpi xmlns:a14="http://schemas.microsoft.com/office/drawing/2010/main" val="0"/>
+              </a:ext>
+            </a:extLst>
+          </a:blip>
+          <a:stretch>
+            <a:fillRect/>
+          </a:stretch>
+        </p:blipFill>
+        <p:spPr>
+          <a:xfrm>
+            <a:off x="10488266" y="310124"/>
+            <a:ext cx="865534" cy="865534"/>
+          </a:xfrm>
+        </p:spPr>
+      </p:pic>
+      <p:cxnSp>
+        <p:nvCxnSpPr>
+          <p:cNvPr id="7" name="直接连接符 6">
+            <a:extLst>
+              <a:ext uri="{FF2B5EF4-FFF2-40B4-BE49-F238E27FC236}">
+                <a16:creationId xmlns:a16="http://schemas.microsoft.com/office/drawing/2014/main" id="{E2CD527D-10E2-3C80-1414-464C446ADB6F}"/>
+              </a:ext>
+            </a:extLst>
+          </p:cNvPr>
+          <p:cNvCxnSpPr/>
+          <p:nvPr/>
+        </p:nvCxnSpPr>
+        <p:spPr>
+          <a:xfrm>
+            <a:off x="893774" y="1236928"/>
+            <a:ext cx="10548000" cy="0"/>
+          </a:xfrm>
+          <a:prstGeom prst="line">
+            <a:avLst/>
+          </a:prstGeom>
+        </p:spPr>
+        <p:style>
+          <a:lnRef idx="1">
+            <a:schemeClr val="accent1"/>
+          </a:lnRef>
+          <a:fillRef idx="0">
+            <a:schemeClr val="accent1"/>
+          </a:fillRef>
+          <a:effectRef idx="0">
+            <a:schemeClr val="accent1"/>
+          </a:effectRef>
+          <a:fontRef idx="minor">
+            <a:schemeClr val="tx1"/>
+          </a:fontRef>
+        </p:style>
+      </p:cxnSp>
+      <p:pic>
+        <p:nvPicPr>
+          <p:cNvPr id="4" name="图片 3">
+            <a:extLst>
+              <a:ext uri="{FF2B5EF4-FFF2-40B4-BE49-F238E27FC236}">
+                <a16:creationId xmlns:a16="http://schemas.microsoft.com/office/drawing/2014/main" id="{FF0F94EC-360D-C3F2-2A3C-DB4223A81D34}"/>
+              </a:ext>
+            </a:extLst>
+          </p:cNvPr>
+          <p:cNvPicPr>
+            <a:picLocks noChangeAspect="1"/>
+          </p:cNvPicPr>
+          <p:nvPr/>
+        </p:nvPicPr>
+        <p:blipFill>
+          <a:blip r:embed="rId3">
+            <a:extLst>
+              <a:ext uri="{28A0092B-C50C-407E-A947-70E740481C1C}">
+                <a14:useLocalDpi xmlns:a14="http://schemas.microsoft.com/office/drawing/2010/main" val="0"/>
+              </a:ext>
+            </a:extLst>
+          </a:blip>
+          <a:stretch>
+            <a:fillRect/>
+          </a:stretch>
+        </p:blipFill>
+        <p:spPr>
+          <a:xfrm>
+            <a:off x="1016337" y="1619108"/>
+            <a:ext cx="5418970" cy="4813321"/>
+          </a:xfrm>
+          <a:prstGeom prst="rect">
+            <a:avLst/>
+          </a:prstGeom>
+        </p:spPr>
+      </p:pic>
+      <p:sp>
+        <p:nvSpPr>
+          <p:cNvPr id="8" name="文本框 7">
+            <a:extLst>
+              <a:ext uri="{FF2B5EF4-FFF2-40B4-BE49-F238E27FC236}">
+                <a16:creationId xmlns:a16="http://schemas.microsoft.com/office/drawing/2014/main" id="{99F2A13F-EE8A-1907-D599-41B6C9EC98AF}"/>
+              </a:ext>
+            </a:extLst>
+          </p:cNvPr>
+          <p:cNvSpPr txBox="1"/>
+          <p:nvPr/>
+        </p:nvSpPr>
+        <p:spPr>
+          <a:xfrm>
+            <a:off x="7188679" y="3279410"/>
+            <a:ext cx="6096000" cy="746358"/>
+          </a:xfrm>
+          <a:prstGeom prst="rect">
+            <a:avLst/>
+          </a:prstGeom>
+          <a:noFill/>
+        </p:spPr>
+        <p:txBody>
+          <a:bodyPr wrap="square">
+            <a:spAutoFit/>
+          </a:bodyPr>
+          <a:lstStyle/>
+          <a:p>
+            <a:pPr>
+              <a:lnSpc>
+                <a:spcPts val="2099"/>
+              </a:lnSpc>
+              <a:spcAft>
+                <a:spcPts val="900"/>
+              </a:spcAft>
+            </a:pPr>
+            <a:r>
+              <a:rPr lang="en-US" altLang="zh-CN" b="1" i="0" dirty="0">
+                <a:solidFill>
+                  <a:srgbClr val="000000"/>
+                </a:solidFill>
+                <a:effectLst/>
+                <a:latin typeface="Lucida Grande"/>
+              </a:rPr>
+              <a:t>Training Very Deep Networks </a:t>
+            </a:r>
+          </a:p>
+          <a:p>
+            <a:pPr>
+              <a:lnSpc>
+                <a:spcPts val="2099"/>
+              </a:lnSpc>
+              <a:spcAft>
+                <a:spcPts val="900"/>
+              </a:spcAft>
+            </a:pPr>
+            <a:r>
+              <a:rPr lang="en-US" altLang="zh-CN" dirty="0"/>
+              <a:t>Neural Information Processing Systems 2015</a:t>
+            </a:r>
+            <a:endParaRPr lang="en-US" altLang="zh-CN" b="1" i="0" dirty="0">
+              <a:solidFill>
+                <a:srgbClr val="000000"/>
+              </a:solidFill>
+              <a:effectLst/>
+              <a:latin typeface="Lucida Grande"/>
+            </a:endParaRPr>
+          </a:p>
+        </p:txBody>
+      </p:sp>
+    </p:spTree>
+    <p:extLst>
+      <p:ext uri="{BB962C8B-B14F-4D97-AF65-F5344CB8AC3E}">
+        <p14:creationId xmlns:p14="http://schemas.microsoft.com/office/powerpoint/2010/main" val="3946219806"/>
       </p:ext>
     </p:extLst>
   </p:cSld>
